--- a/6. Monte Carlo Method/5주차 Homework.pptx
+++ b/6. Monte Carlo Method/5주차 Homework.pptx
@@ -9,10 +9,12 @@
     <p:sldId id="257" r:id="rId3"/>
     <p:sldId id="258" r:id="rId4"/>
     <p:sldId id="259" r:id="rId5"/>
-    <p:sldId id="263" r:id="rId6"/>
-    <p:sldId id="262" r:id="rId7"/>
-    <p:sldId id="261" r:id="rId8"/>
-    <p:sldId id="260" r:id="rId9"/>
+    <p:sldId id="264" r:id="rId6"/>
+    <p:sldId id="263" r:id="rId7"/>
+    <p:sldId id="262" r:id="rId8"/>
+    <p:sldId id="265" r:id="rId9"/>
+    <p:sldId id="261" r:id="rId10"/>
+    <p:sldId id="260" r:id="rId11"/>
   </p:sldIdLst>
   <p:sldSz cx="12192000" cy="6858000"/>
   <p:notesSz cx="6858000" cy="9144000"/>
@@ -823,7 +825,7 @@
   <pc:docChgLst>
     <pc:chgData name="택주 권" userId="ccd56deedaff4490" providerId="LiveId" clId="{84135328-FAF5-4BDC-8680-EBC58F42D27C}"/>
     <pc:docChg chg="undo custSel addSld delSld modSld sldOrd">
-      <pc:chgData name="택주 권" userId="ccd56deedaff4490" providerId="LiveId" clId="{84135328-FAF5-4BDC-8680-EBC58F42D27C}" dt="2026-10-06T15:41:36.481" v="6235" actId="1035"/>
+      <pc:chgData name="택주 권" userId="ccd56deedaff4490" providerId="LiveId" clId="{84135328-FAF5-4BDC-8680-EBC58F42D27C}" dt="2026-10-12T02:14:51.463" v="8002" actId="6549"/>
       <pc:docMkLst>
         <pc:docMk/>
       </pc:docMkLst>
@@ -873,7 +875,7 @@
         </pc:spChg>
       </pc:sldChg>
       <pc:sldChg chg="addSp delSp modSp mod">
-        <pc:chgData name="택주 권" userId="ccd56deedaff4490" providerId="LiveId" clId="{84135328-FAF5-4BDC-8680-EBC58F42D27C}" dt="2026-10-05T14:51:34.049" v="210" actId="12612"/>
+        <pc:chgData name="택주 권" userId="ccd56deedaff4490" providerId="LiveId" clId="{84135328-FAF5-4BDC-8680-EBC58F42D27C}" dt="2026-10-12T02:01:26.825" v="6243" actId="12612"/>
         <pc:sldMkLst>
           <pc:docMk/>
           <pc:sldMk cId="2852760341" sldId="259"/>
@@ -895,7 +897,7 @@
           </ac:spMkLst>
         </pc:spChg>
         <pc:graphicFrameChg chg="add mod modGraphic">
-          <ac:chgData name="택주 권" userId="ccd56deedaff4490" providerId="LiveId" clId="{84135328-FAF5-4BDC-8680-EBC58F42D27C}" dt="2026-10-05T14:51:34.049" v="210" actId="12612"/>
+          <ac:chgData name="택주 권" userId="ccd56deedaff4490" providerId="LiveId" clId="{84135328-FAF5-4BDC-8680-EBC58F42D27C}" dt="2026-10-12T02:01:26.825" v="6243" actId="12612"/>
           <ac:graphicFrameMkLst>
             <pc:docMk/>
             <pc:sldMk cId="2852760341" sldId="259"/>
@@ -908,6 +910,14 @@
             <pc:docMk/>
             <pc:sldMk cId="2852760341" sldId="259"/>
             <ac:picMk id="5" creationId="{9E598406-DF18-64EA-E10B-27E790E4EAAA}"/>
+          </ac:picMkLst>
+        </pc:picChg>
+        <pc:picChg chg="add del">
+          <ac:chgData name="택주 권" userId="ccd56deedaff4490" providerId="LiveId" clId="{84135328-FAF5-4BDC-8680-EBC58F42D27C}" dt="2026-10-12T02:01:02.374" v="6241" actId="22"/>
+          <ac:picMkLst>
+            <pc:docMk/>
+            <pc:sldMk cId="2852760341" sldId="259"/>
+            <ac:picMk id="6" creationId="{BDAED08B-2957-ECE4-3BE6-F8364F8CB604}"/>
           </ac:picMkLst>
         </pc:picChg>
       </pc:sldChg>
@@ -964,13 +974,13 @@
         </pc:sldMkLst>
       </pc:sldChg>
       <pc:sldChg chg="addSp modSp add mod">
-        <pc:chgData name="택주 권" userId="ccd56deedaff4490" providerId="LiveId" clId="{84135328-FAF5-4BDC-8680-EBC58F42D27C}" dt="2026-10-05T14:46:13.944" v="201" actId="404"/>
+        <pc:chgData name="택주 권" userId="ccd56deedaff4490" providerId="LiveId" clId="{84135328-FAF5-4BDC-8680-EBC58F42D27C}" dt="2026-10-12T02:02:57.122" v="6253" actId="12612"/>
         <pc:sldMkLst>
           <pc:docMk/>
           <pc:sldMk cId="3977347988" sldId="262"/>
         </pc:sldMkLst>
         <pc:graphicFrameChg chg="add mod modGraphic">
-          <ac:chgData name="택주 권" userId="ccd56deedaff4490" providerId="LiveId" clId="{84135328-FAF5-4BDC-8680-EBC58F42D27C}" dt="2026-10-05T14:46:13.944" v="201" actId="404"/>
+          <ac:chgData name="택주 권" userId="ccd56deedaff4490" providerId="LiveId" clId="{84135328-FAF5-4BDC-8680-EBC58F42D27C}" dt="2026-10-12T02:02:57.122" v="6253" actId="12612"/>
           <ac:graphicFrameMkLst>
             <pc:docMk/>
             <pc:sldMk cId="3977347988" sldId="262"/>
@@ -1000,6 +1010,37 @@
           <pc:sldMk cId="2976407003" sldId="263"/>
         </pc:sldMkLst>
       </pc:sldChg>
+      <pc:sldChg chg="addSp delSp modSp add mod">
+        <pc:chgData name="택주 권" userId="ccd56deedaff4490" providerId="LiveId" clId="{84135328-FAF5-4BDC-8680-EBC58F42D27C}" dt="2026-10-12T02:10:00.205" v="7054" actId="20577"/>
+        <pc:sldMkLst>
+          <pc:docMk/>
+          <pc:sldMk cId="1540457056" sldId="264"/>
+        </pc:sldMkLst>
+        <pc:spChg chg="add mod">
+          <ac:chgData name="택주 권" userId="ccd56deedaff4490" providerId="LiveId" clId="{84135328-FAF5-4BDC-8680-EBC58F42D27C}" dt="2026-10-12T02:10:00.205" v="7054" actId="20577"/>
+          <ac:spMkLst>
+            <pc:docMk/>
+            <pc:sldMk cId="1540457056" sldId="264"/>
+            <ac:spMk id="7" creationId="{1EA80262-3CC0-EA71-CAF3-B5B5D2EE201F}"/>
+          </ac:spMkLst>
+        </pc:spChg>
+        <pc:graphicFrameChg chg="del">
+          <ac:chgData name="택주 권" userId="ccd56deedaff4490" providerId="LiveId" clId="{84135328-FAF5-4BDC-8680-EBC58F42D27C}" dt="2026-10-12T02:01:34.321" v="6245" actId="478"/>
+          <ac:graphicFrameMkLst>
+            <pc:docMk/>
+            <pc:sldMk cId="1540457056" sldId="264"/>
+            <ac:graphicFrameMk id="4" creationId="{E2914935-A38F-49A6-2C79-46070192F95B}"/>
+          </ac:graphicFrameMkLst>
+        </pc:graphicFrameChg>
+        <pc:picChg chg="add mod">
+          <ac:chgData name="택주 권" userId="ccd56deedaff4490" providerId="LiveId" clId="{84135328-FAF5-4BDC-8680-EBC58F42D27C}" dt="2026-10-12T02:03:40.400" v="6259" actId="1076"/>
+          <ac:picMkLst>
+            <pc:docMk/>
+            <pc:sldMk cId="1540457056" sldId="264"/>
+            <ac:picMk id="6" creationId="{57D28BBF-9E67-20F0-BBFC-637250251C2B}"/>
+          </ac:picMkLst>
+        </pc:picChg>
+      </pc:sldChg>
       <pc:sldChg chg="del">
         <pc:chgData name="택주 권" userId="ccd56deedaff4490" providerId="LiveId" clId="{84135328-FAF5-4BDC-8680-EBC58F42D27C}" dt="2026-10-05T14:17:18.017" v="52" actId="47"/>
         <pc:sldMkLst>
@@ -1013,6 +1054,45 @@
           <pc:docMk/>
           <pc:sldMk cId="1195735357" sldId="265"/>
         </pc:sldMkLst>
+      </pc:sldChg>
+      <pc:sldChg chg="addSp delSp modSp add mod">
+        <pc:chgData name="택주 권" userId="ccd56deedaff4490" providerId="LiveId" clId="{84135328-FAF5-4BDC-8680-EBC58F42D27C}" dt="2026-10-12T02:14:51.463" v="8002" actId="6549"/>
+        <pc:sldMkLst>
+          <pc:docMk/>
+          <pc:sldMk cId="4168697494" sldId="265"/>
+        </pc:sldMkLst>
+        <pc:spChg chg="add mod">
+          <ac:chgData name="택주 권" userId="ccd56deedaff4490" providerId="LiveId" clId="{84135328-FAF5-4BDC-8680-EBC58F42D27C}" dt="2026-10-12T02:10:06.353" v="7055"/>
+          <ac:spMkLst>
+            <pc:docMk/>
+            <pc:sldMk cId="4168697494" sldId="265"/>
+            <ac:spMk id="7" creationId="{FF2317BD-FBBB-B9F0-3F2D-F9E74087251B}"/>
+          </ac:spMkLst>
+        </pc:spChg>
+        <pc:spChg chg="add mod">
+          <ac:chgData name="택주 권" userId="ccd56deedaff4490" providerId="LiveId" clId="{84135328-FAF5-4BDC-8680-EBC58F42D27C}" dt="2026-10-12T02:14:51.463" v="8002" actId="6549"/>
+          <ac:spMkLst>
+            <pc:docMk/>
+            <pc:sldMk cId="4168697494" sldId="265"/>
+            <ac:spMk id="8" creationId="{ADD74F28-F057-72DF-86BC-2C0FA413F6A1}"/>
+          </ac:spMkLst>
+        </pc:spChg>
+        <pc:graphicFrameChg chg="del">
+          <ac:chgData name="택주 권" userId="ccd56deedaff4490" providerId="LiveId" clId="{84135328-FAF5-4BDC-8680-EBC58F42D27C}" dt="2026-10-12T02:01:40.145" v="6247" actId="478"/>
+          <ac:graphicFrameMkLst>
+            <pc:docMk/>
+            <pc:sldMk cId="4168697494" sldId="265"/>
+            <ac:graphicFrameMk id="4" creationId="{4310EFC3-BCD6-55C4-321B-0E4B59F33698}"/>
+          </ac:graphicFrameMkLst>
+        </pc:graphicFrameChg>
+        <pc:picChg chg="add mod">
+          <ac:chgData name="택주 권" userId="ccd56deedaff4490" providerId="LiveId" clId="{84135328-FAF5-4BDC-8680-EBC58F42D27C}" dt="2026-10-12T02:10:17.212" v="7057" actId="14100"/>
+          <ac:picMkLst>
+            <pc:docMk/>
+            <pc:sldMk cId="4168697494" sldId="265"/>
+            <ac:picMk id="6" creationId="{CF0C7111-E373-228F-C18F-7E2ACD5A6C86}"/>
+          </ac:picMkLst>
+        </pc:picChg>
       </pc:sldChg>
     </pc:docChg>
   </pc:docChgLst>
@@ -1166,7 +1246,7 @@
           <a:p>
             <a:fld id="{0028FE92-352A-4F29-A53E-D4449191C064}" type="datetimeFigureOut">
               <a:rPr lang="ko-KR" altLang="en-US" smtClean="0"/>
-              <a:t>2026-10-07</a:t>
+              <a:t>2026-10-12</a:t>
             </a:fld>
             <a:endParaRPr lang="ko-KR" altLang="en-US"/>
           </a:p>
@@ -1400,7 +1480,7 @@
           <a:p>
             <a:fld id="{0028FE92-352A-4F29-A53E-D4449191C064}" type="datetimeFigureOut">
               <a:rPr lang="ko-KR" altLang="en-US" smtClean="0"/>
-              <a:t>2026-10-07</a:t>
+              <a:t>2026-10-12</a:t>
             </a:fld>
             <a:endParaRPr lang="ko-KR" altLang="en-US"/>
           </a:p>
@@ -1608,7 +1688,7 @@
           <a:p>
             <a:fld id="{0028FE92-352A-4F29-A53E-D4449191C064}" type="datetimeFigureOut">
               <a:rPr lang="ko-KR" altLang="en-US" smtClean="0"/>
-              <a:t>2026-10-07</a:t>
+              <a:t>2026-10-12</a:t>
             </a:fld>
             <a:endParaRPr lang="ko-KR" altLang="en-US"/>
           </a:p>
@@ -1813,7 +1893,7 @@
           <a:p>
             <a:fld id="{0028FE92-352A-4F29-A53E-D4449191C064}" type="datetimeFigureOut">
               <a:rPr lang="ko-KR" altLang="en-US" smtClean="0"/>
-              <a:t>2026-10-07</a:t>
+              <a:t>2026-10-12</a:t>
             </a:fld>
             <a:endParaRPr lang="ko-KR" altLang="en-US"/>
           </a:p>
@@ -2124,7 +2204,7 @@
           <a:p>
             <a:fld id="{0028FE92-352A-4F29-A53E-D4449191C064}" type="datetimeFigureOut">
               <a:rPr lang="ko-KR" altLang="en-US" smtClean="0"/>
-              <a:t>2026-10-07</a:t>
+              <a:t>2026-10-12</a:t>
             </a:fld>
             <a:endParaRPr lang="ko-KR" altLang="en-US"/>
           </a:p>
@@ -2389,7 +2469,7 @@
           <a:p>
             <a:fld id="{0028FE92-352A-4F29-A53E-D4449191C064}" type="datetimeFigureOut">
               <a:rPr lang="ko-KR" altLang="en-US" smtClean="0"/>
-              <a:t>2026-10-07</a:t>
+              <a:t>2026-10-12</a:t>
             </a:fld>
             <a:endParaRPr lang="ko-KR" altLang="en-US"/>
           </a:p>
@@ -2801,7 +2881,7 @@
           <a:p>
             <a:fld id="{0028FE92-352A-4F29-A53E-D4449191C064}" type="datetimeFigureOut">
               <a:rPr lang="ko-KR" altLang="en-US" smtClean="0"/>
-              <a:t>2026-10-07</a:t>
+              <a:t>2026-10-12</a:t>
             </a:fld>
             <a:endParaRPr lang="ko-KR" altLang="en-US"/>
           </a:p>
@@ -2942,7 +3022,7 @@
           <a:p>
             <a:fld id="{0028FE92-352A-4F29-A53E-D4449191C064}" type="datetimeFigureOut">
               <a:rPr lang="ko-KR" altLang="en-US" smtClean="0"/>
-              <a:t>2026-10-07</a:t>
+              <a:t>2026-10-12</a:t>
             </a:fld>
             <a:endParaRPr lang="ko-KR" altLang="en-US"/>
           </a:p>
@@ -3055,7 +3135,7 @@
           <a:p>
             <a:fld id="{0028FE92-352A-4F29-A53E-D4449191C064}" type="datetimeFigureOut">
               <a:rPr lang="ko-KR" altLang="en-US" smtClean="0"/>
-              <a:t>2026-10-07</a:t>
+              <a:t>2026-10-12</a:t>
             </a:fld>
             <a:endParaRPr lang="ko-KR" altLang="en-US"/>
           </a:p>
@@ -3366,7 +3446,7 @@
           <a:p>
             <a:fld id="{0028FE92-352A-4F29-A53E-D4449191C064}" type="datetimeFigureOut">
               <a:rPr lang="ko-KR" altLang="en-US" smtClean="0"/>
-              <a:t>2026-10-07</a:t>
+              <a:t>2026-10-12</a:t>
             </a:fld>
             <a:endParaRPr lang="ko-KR" altLang="en-US"/>
           </a:p>
@@ -3654,7 +3734,7 @@
           <a:p>
             <a:fld id="{0028FE92-352A-4F29-A53E-D4449191C064}" type="datetimeFigureOut">
               <a:rPr lang="ko-KR" altLang="en-US" smtClean="0"/>
-              <a:t>2026-10-07</a:t>
+              <a:t>2026-10-12</a:t>
             </a:fld>
             <a:endParaRPr lang="ko-KR" altLang="en-US"/>
           </a:p>
@@ -3895,7 +3975,7 @@
           <a:p>
             <a:fld id="{0028FE92-352A-4F29-A53E-D4449191C064}" type="datetimeFigureOut">
               <a:rPr lang="ko-KR" altLang="en-US" smtClean="0"/>
-              <a:t>2026-10-07</a:t>
+              <a:t>2026-10-12</a:t>
             </a:fld>
             <a:endParaRPr lang="ko-KR" altLang="en-US"/>
           </a:p>
@@ -4485,6 +4565,198 @@
 </p:sld>
 </file>
 
+<file path=ppt/slides/slide10.xml><?xml version="1.0" encoding="utf-8"?>
+<p:sld xmlns:a="http://schemas.openxmlformats.org/drawingml/2006/main" xmlns:r="http://schemas.openxmlformats.org/officeDocument/2006/relationships" xmlns:p="http://schemas.openxmlformats.org/presentationml/2006/main">
+  <p:cSld>
+    <p:spTree>
+      <p:nvGrpSpPr>
+        <p:cNvPr id="1" name=""/>
+        <p:cNvGrpSpPr/>
+        <p:nvPr/>
+      </p:nvGrpSpPr>
+      <p:grpSpPr>
+        <a:xfrm>
+          <a:off x="0" y="0"/>
+          <a:ext cx="0" cy="0"/>
+          <a:chOff x="0" y="0"/>
+          <a:chExt cx="0" cy="0"/>
+        </a:xfrm>
+      </p:grpSpPr>
+      <p:sp>
+        <p:nvSpPr>
+          <p:cNvPr id="2" name="제목 1">
+            <a:extLst>
+              <a:ext uri="{FF2B5EF4-FFF2-40B4-BE49-F238E27FC236}">
+                <a16:creationId xmlns:a16="http://schemas.microsoft.com/office/drawing/2014/main" id="{4F5A8108-ED05-C8B3-538C-B61C977CDB8A}"/>
+              </a:ext>
+            </a:extLst>
+          </p:cNvPr>
+          <p:cNvSpPr>
+            <a:spLocks noGrp="1"/>
+          </p:cNvSpPr>
+          <p:nvPr>
+            <p:ph type="title"/>
+          </p:nvPr>
+        </p:nvSpPr>
+        <p:spPr/>
+        <p:txBody>
+          <a:bodyPr/>
+          <a:lstStyle/>
+          <a:p>
+            <a:r>
+              <a:rPr lang="ko-KR" altLang="en-US" dirty="0"/>
+              <a:t>과제 결과</a:t>
+            </a:r>
+          </a:p>
+        </p:txBody>
+      </p:sp>
+      <p:sp>
+        <p:nvSpPr>
+          <p:cNvPr id="3" name="내용 개체 틀 2">
+            <a:extLst>
+              <a:ext uri="{FF2B5EF4-FFF2-40B4-BE49-F238E27FC236}">
+                <a16:creationId xmlns:a16="http://schemas.microsoft.com/office/drawing/2014/main" id="{E7C4356A-B9C5-EDE9-1DDC-9DA3BC6B9B9A}"/>
+              </a:ext>
+            </a:extLst>
+          </p:cNvPr>
+          <p:cNvSpPr>
+            <a:spLocks noGrp="1"/>
+          </p:cNvSpPr>
+          <p:nvPr>
+            <p:ph idx="1"/>
+          </p:nvPr>
+        </p:nvSpPr>
+        <p:spPr/>
+        <p:txBody>
+          <a:bodyPr/>
+          <a:lstStyle/>
+          <a:p>
+            <a:pPr marL="514350" indent="-514350">
+              <a:buFont typeface="+mj-lt"/>
+              <a:buAutoNum type="arabicPeriod"/>
+            </a:pPr>
+            <a:r>
+              <a:rPr lang="en-US" altLang="ko-KR" b="1" dirty="0"/>
+              <a:t>Epsilon</a:t>
+            </a:r>
+          </a:p>
+          <a:p>
+            <a:pPr lvl="1"/>
+            <a:r>
+              <a:rPr lang="en-US" altLang="ko-KR" dirty="0"/>
+              <a:t>Agent</a:t>
+            </a:r>
+            <a:r>
+              <a:rPr lang="ko-KR" altLang="en-US" dirty="0"/>
+              <a:t>가 다양한 </a:t>
+            </a:r>
+            <a:r>
+              <a:rPr lang="en-US" altLang="ko-KR" dirty="0"/>
+              <a:t>Action</a:t>
+            </a:r>
+            <a:r>
+              <a:rPr lang="ko-KR" altLang="en-US" dirty="0"/>
+              <a:t>을 탐색하는 정도를 결정해 학습에 사용되는 경험 자체 변화</a:t>
+            </a:r>
+            <a:endParaRPr lang="en-US" altLang="ko-KR" dirty="0"/>
+          </a:p>
+          <a:p>
+            <a:pPr lvl="1"/>
+            <a:r>
+              <a:rPr lang="ko-KR" altLang="en-US" dirty="0"/>
+              <a:t>해당 값이 작을 경우 탐색이 부족하고</a:t>
+            </a:r>
+            <a:r>
+              <a:rPr lang="en-US" altLang="ko-KR" dirty="0"/>
+              <a:t>, </a:t>
+            </a:r>
+            <a:r>
+              <a:rPr lang="ko-KR" altLang="en-US" dirty="0"/>
+              <a:t>클 경우 무작위 행동이 증가</a:t>
+            </a:r>
+            <a:endParaRPr lang="en-US" altLang="ko-KR" dirty="0"/>
+          </a:p>
+          <a:p>
+            <a:pPr marL="514350" indent="-514350">
+              <a:buFont typeface="+mj-lt"/>
+              <a:buAutoNum type="arabicPeriod"/>
+            </a:pPr>
+            <a:r>
+              <a:rPr lang="en-US" altLang="ko-KR" b="1" dirty="0"/>
+              <a:t>Alpha</a:t>
+            </a:r>
+          </a:p>
+          <a:p>
+            <a:pPr lvl="1"/>
+            <a:r>
+              <a:rPr lang="ko-KR" altLang="en-US" dirty="0"/>
+              <a:t>해당 경험으로 얻은 </a:t>
+            </a:r>
+            <a:r>
+              <a:rPr lang="en-US" altLang="ko-KR" dirty="0"/>
+              <a:t>Return</a:t>
+            </a:r>
+            <a:r>
+              <a:rPr lang="ko-KR" altLang="en-US" dirty="0"/>
+              <a:t>을 </a:t>
+            </a:r>
+            <a:r>
+              <a:rPr lang="en-US" altLang="ko-KR" dirty="0"/>
+              <a:t>Q Function </a:t>
+            </a:r>
+            <a:r>
+              <a:rPr lang="ko-KR" altLang="en-US" dirty="0"/>
+              <a:t>에 반영하는 정도 결정</a:t>
+            </a:r>
+            <a:endParaRPr lang="en-US" altLang="ko-KR" dirty="0"/>
+          </a:p>
+          <a:p>
+            <a:pPr lvl="1"/>
+            <a:r>
+              <a:rPr lang="ko-KR" altLang="en-US" dirty="0"/>
+              <a:t>해당 값이 작을 경우</a:t>
+            </a:r>
+            <a:r>
+              <a:rPr lang="en-US" altLang="ko-KR" dirty="0"/>
+              <a:t> </a:t>
+            </a:r>
+            <a:r>
+              <a:rPr lang="ko-KR" altLang="en-US" dirty="0"/>
+              <a:t>학습 속도가 저하되고</a:t>
+            </a:r>
+            <a:r>
+              <a:rPr lang="en-US" altLang="ko-KR" dirty="0"/>
+              <a:t>, </a:t>
+            </a:r>
+            <a:r>
+              <a:rPr lang="ko-KR" altLang="en-US" dirty="0"/>
+              <a:t>클 경우 최근 </a:t>
+            </a:r>
+            <a:r>
+              <a:rPr lang="en-US" altLang="ko-KR" dirty="0"/>
+              <a:t>Episode </a:t>
+            </a:r>
+            <a:r>
+              <a:rPr lang="ko-KR" altLang="en-US" dirty="0"/>
+              <a:t>민감도 증가</a:t>
+            </a:r>
+            <a:endParaRPr lang="en-US" altLang="ko-KR" dirty="0"/>
+          </a:p>
+        </p:txBody>
+      </p:sp>
+    </p:spTree>
+    <p:extLst>
+      <p:ext uri="{BB962C8B-B14F-4D97-AF65-F5344CB8AC3E}">
+        <p14:creationId xmlns:p14="http://schemas.microsoft.com/office/powerpoint/2010/main" val="2170711995"/>
+      </p:ext>
+    </p:extLst>
+  </p:cSld>
+  <p:clrMapOvr>
+    <a:masterClrMapping/>
+  </p:clrMapOvr>
+</p:sld>
+</file>
+
 <file path=ppt/slides/slide2.xml><?xml version="1.0" encoding="utf-8"?>
 <p:sld xmlns:a="http://schemas.openxmlformats.org/drawingml/2006/main" xmlns:r="http://schemas.openxmlformats.org/officeDocument/2006/relationships" xmlns:p="http://schemas.openxmlformats.org/presentationml/2006/main">
   <p:cSld>
@@ -4938,7 +5210,7 @@
           <p:nvPr>
             <p:extLst>
               <p:ext uri="{D42A27DB-BD31-4B8C-83A1-F6EECF244321}">
-                <p14:modId xmlns:p14="http://schemas.microsoft.com/office/powerpoint/2010/main" val="1982522743"/>
+                <p14:modId xmlns:p14="http://schemas.microsoft.com/office/powerpoint/2010/main" val="2601122449"/>
               </p:ext>
             </p:extLst>
           </p:nvPr>
@@ -5303,12 +5575,42 @@
           </a:p>
         </p:txBody>
       </p:sp>
-      <p:sp>
-        <p:nvSpPr>
-          <p:cNvPr id="4" name="TextBox 3">
-            <a:extLst>
-              <a:ext uri="{FF2B5EF4-FFF2-40B4-BE49-F238E27FC236}">
-                <a16:creationId xmlns:a16="http://schemas.microsoft.com/office/drawing/2014/main" id="{FD667B59-952B-A6C2-1647-BE025B36AA19}"/>
+      <p:pic>
+        <p:nvPicPr>
+          <p:cNvPr id="6" name="그림 5">
+            <a:extLst>
+              <a:ext uri="{FF2B5EF4-FFF2-40B4-BE49-F238E27FC236}">
+                <a16:creationId xmlns:a16="http://schemas.microsoft.com/office/drawing/2014/main" id="{57D28BBF-9E67-20F0-BBFC-637250251C2B}"/>
+              </a:ext>
+            </a:extLst>
+          </p:cNvPr>
+          <p:cNvPicPr>
+            <a:picLocks noChangeAspect="1"/>
+          </p:cNvPicPr>
+          <p:nvPr/>
+        </p:nvPicPr>
+        <p:blipFill>
+          <a:blip r:embed="rId2"/>
+          <a:stretch>
+            <a:fillRect/>
+          </a:stretch>
+        </p:blipFill>
+        <p:spPr>
+          <a:xfrm>
+            <a:off x="6339840" y="2025174"/>
+            <a:ext cx="5448088" cy="3952240"/>
+          </a:xfrm>
+          <a:prstGeom prst="rect">
+            <a:avLst/>
+          </a:prstGeom>
+        </p:spPr>
+      </p:pic>
+      <p:sp>
+        <p:nvSpPr>
+          <p:cNvPr id="7" name="TextBox 6">
+            <a:extLst>
+              <a:ext uri="{FF2B5EF4-FFF2-40B4-BE49-F238E27FC236}">
+                <a16:creationId xmlns:a16="http://schemas.microsoft.com/office/drawing/2014/main" id="{1EA80262-3CC0-EA71-CAF3-B5B5D2EE201F}"/>
               </a:ext>
             </a:extLst>
           </p:cNvPr>
@@ -5317,8 +5619,8 @@
         </p:nvSpPr>
         <p:spPr>
           <a:xfrm>
-            <a:off x="951738" y="2387272"/>
-            <a:ext cx="10402062" cy="3139321"/>
+            <a:off x="325120" y="2387272"/>
+            <a:ext cx="6014720" cy="3139321"/>
           </a:xfrm>
           <a:prstGeom prst="rect">
             <a:avLst/>
@@ -5336,24 +5638,20 @@
               <a:buChar char="•"/>
             </a:pPr>
             <a:r>
-              <a:rPr lang="ko-KR" altLang="en-US" dirty="0"/>
-              <a:t>엡실론은 비율 결정</a:t>
-            </a:r>
-            <a:r>
-              <a:rPr lang="en-US" altLang="ko-KR" dirty="0"/>
-              <a:t>. </a:t>
-            </a:r>
-            <a:r>
-              <a:rPr lang="ko-KR" altLang="en-US" dirty="0"/>
-              <a:t>크기가 커질 수록 현재 </a:t>
-            </a:r>
-            <a:r>
-              <a:rPr lang="en-US" altLang="ko-KR" dirty="0"/>
-              <a:t>Greedy Action</a:t>
-            </a:r>
-            <a:r>
-              <a:rPr lang="ko-KR" altLang="en-US" dirty="0"/>
-              <a:t> 이외 행동을 선택할 확률 증가</a:t>
+              <a:rPr lang="en-US" altLang="ko-KR" dirty="0"/>
+              <a:t>Epsilon</a:t>
+            </a:r>
+            <a:r>
+              <a:rPr lang="ko-KR" altLang="en-US" dirty="0"/>
+              <a:t>이 증가할수록 무작위 행동 선택 확률이 증가</a:t>
+            </a:r>
+            <a:r>
+              <a:rPr lang="en-US" altLang="ko-KR" dirty="0"/>
+              <a:t>, Return </a:t>
+            </a:r>
+            <a:r>
+              <a:rPr lang="ko-KR" altLang="en-US" dirty="0"/>
+              <a:t>감소 경향 발생</a:t>
             </a:r>
             <a:endParaRPr lang="en-US" altLang="ko-KR" dirty="0"/>
           </a:p>
@@ -5363,32 +5661,36 @@
               <a:buChar char="•"/>
             </a:pPr>
             <a:r>
-              <a:rPr lang="en-US" altLang="ko-KR" b="1" dirty="0"/>
+              <a:rPr lang="en-US" altLang="ko-KR" dirty="0"/>
               <a:t>0.01</a:t>
             </a:r>
             <a:r>
-              <a:rPr lang="en-US" altLang="ko-KR" dirty="0"/>
-              <a:t> : </a:t>
-            </a:r>
-            <a:r>
-              <a:rPr lang="ko-KR" altLang="en-US" dirty="0"/>
-              <a:t>주로 실제 이동 경로</a:t>
-            </a:r>
-            <a:r>
-              <a:rPr lang="en-US" altLang="ko-KR" dirty="0"/>
-              <a:t>. </a:t>
-            </a:r>
-            <a:r>
-              <a:rPr lang="ko-KR" altLang="en-US" dirty="0"/>
-              <a:t>탐색 확률이 낮아 기존에 높은 </a:t>
-            </a:r>
-            <a:r>
-              <a:rPr lang="en-US" altLang="ko-KR" dirty="0"/>
-              <a:t>Q</a:t>
-            </a:r>
-            <a:r>
-              <a:rPr lang="ko-KR" altLang="en-US" dirty="0"/>
-              <a:t>값을 가진 행동을 반복적으로 선택</a:t>
+              <a:rPr lang="ko-KR" altLang="en-US" dirty="0"/>
+              <a:t>에서는 </a:t>
+            </a:r>
+            <a:r>
+              <a:rPr lang="en-US" altLang="ko-KR" dirty="0"/>
+              <a:t>Greedy Action </a:t>
+            </a:r>
+            <a:r>
+              <a:rPr lang="ko-KR" altLang="en-US" dirty="0"/>
+              <a:t>선택확률이 </a:t>
+            </a:r>
+            <a:r>
+              <a:rPr lang="en-US" altLang="ko-KR" dirty="0"/>
+              <a:t>99.25%</a:t>
+            </a:r>
+            <a:r>
+              <a:rPr lang="ko-KR" altLang="en-US" dirty="0"/>
+              <a:t>로 현재 정책 적극 활용</a:t>
+            </a:r>
+            <a:r>
+              <a:rPr lang="en-US" altLang="ko-KR" dirty="0"/>
+              <a:t>. 0.3 </a:t>
+            </a:r>
+            <a:r>
+              <a:rPr lang="ko-KR" altLang="en-US" dirty="0"/>
+              <a:t>이상에서는 탐색 과정에서 불필요한 이동</a:t>
             </a:r>
             <a:r>
               <a:rPr lang="en-US" altLang="ko-KR" dirty="0"/>
@@ -5396,31 +5698,7 @@
             </a:r>
             <a:r>
               <a:rPr lang="ko-KR" altLang="en-US" dirty="0"/>
-              <a:t>일부 </a:t>
-            </a:r>
-            <a:r>
-              <a:rPr lang="en-US" altLang="ko-KR" dirty="0"/>
-              <a:t>State Action</a:t>
-            </a:r>
-            <a:r>
-              <a:rPr lang="ko-KR" altLang="en-US" dirty="0"/>
-              <a:t>은 탐색되지 않아 </a:t>
-            </a:r>
-            <a:r>
-              <a:rPr lang="en-US" altLang="ko-KR" dirty="0"/>
-              <a:t>Q</a:t>
-            </a:r>
-            <a:r>
-              <a:rPr lang="ko-KR" altLang="en-US" dirty="0"/>
-              <a:t>값이 </a:t>
-            </a:r>
-            <a:r>
-              <a:rPr lang="en-US" altLang="ko-KR" dirty="0"/>
-              <a:t>0</a:t>
-            </a:r>
-            <a:r>
-              <a:rPr lang="ko-KR" altLang="en-US" dirty="0"/>
-              <a:t> 근처</a:t>
+              <a:t>음의 보상 경험 가능성 증가</a:t>
             </a:r>
             <a:r>
               <a:rPr lang="en-US" altLang="ko-KR" dirty="0"/>
@@ -5433,24 +5711,20 @@
               <a:buChar char="•"/>
             </a:pPr>
             <a:r>
-              <a:rPr lang="en-US" altLang="ko-KR" b="1" dirty="0"/>
-              <a:t>0.05</a:t>
-            </a:r>
-            <a:r>
-              <a:rPr lang="en-US" altLang="ko-KR" dirty="0"/>
-              <a:t> : 0.01</a:t>
-            </a:r>
-            <a:r>
-              <a:rPr lang="ko-KR" altLang="en-US" dirty="0"/>
-              <a:t>보다 탐색 빈도가 증가해 더 많은 </a:t>
-            </a:r>
-            <a:r>
-              <a:rPr lang="en-US" altLang="ko-KR" dirty="0"/>
-              <a:t>State Action</a:t>
-            </a:r>
-            <a:r>
-              <a:rPr lang="ko-KR" altLang="en-US" dirty="0"/>
-              <a:t>의 </a:t>
+              <a:rPr lang="en-US" altLang="ko-KR" dirty="0"/>
+              <a:t>0.01</a:t>
+            </a:r>
+            <a:r>
+              <a:rPr lang="ko-KR" altLang="en-US" dirty="0"/>
+              <a:t>에서는 대부분 기존 </a:t>
+            </a:r>
+            <a:r>
+              <a:rPr lang="en-US" altLang="ko-KR" dirty="0"/>
+              <a:t>Greedy Action</a:t>
+            </a:r>
+            <a:r>
+              <a:rPr lang="ko-KR" altLang="en-US" dirty="0"/>
+              <a:t>을 선택하므로 </a:t>
             </a:r>
             <a:r>
               <a:rPr lang="en-US" altLang="ko-KR" dirty="0"/>
@@ -5458,25 +5732,36 @@
             </a:r>
             <a:r>
               <a:rPr lang="ko-KR" altLang="en-US" dirty="0"/>
-              <a:t>값 갱신</a:t>
-            </a:r>
-            <a:r>
-              <a:rPr lang="en-US" altLang="ko-KR" dirty="0"/>
-              <a:t>. </a:t>
-            </a:r>
-            <a:r>
-              <a:rPr lang="ko-KR" altLang="en-US" dirty="0"/>
-              <a:t>이에 따라 </a:t>
-            </a:r>
-            <a:r>
-              <a:rPr lang="en-US" altLang="ko-KR" dirty="0"/>
-              <a:t>Greedy Policy </a:t>
-            </a:r>
-            <a:r>
-              <a:rPr lang="ko-KR" altLang="en-US" dirty="0"/>
-              <a:t>일부 방향 변화</a:t>
-            </a:r>
-            <a:endParaRPr lang="en-US" altLang="ko-KR" dirty="0"/>
+              <a:t>값 변화가 상대적으로 작음</a:t>
+            </a:r>
+            <a:r>
+              <a:rPr lang="en-US" altLang="ko-KR" dirty="0"/>
+              <a:t>. 0.5 </a:t>
+            </a:r>
+            <a:r>
+              <a:rPr lang="ko-KR" altLang="en-US" dirty="0"/>
+              <a:t>이상에서는 다양한 행동의 경험</a:t>
+            </a:r>
+            <a:r>
+              <a:rPr lang="en-US" altLang="ko-KR" dirty="0"/>
+              <a:t>, Return </a:t>
+            </a:r>
+            <a:r>
+              <a:rPr lang="ko-KR" altLang="en-US" dirty="0"/>
+              <a:t>차이가 반영되어 </a:t>
+            </a:r>
+            <a:r>
+              <a:rPr lang="en-US" altLang="ko-KR" dirty="0"/>
+              <a:t>Q</a:t>
+            </a:r>
+            <a:r>
+              <a:rPr lang="ko-KR" altLang="en-US" dirty="0"/>
+              <a:t>값 변동이 크게 나타남</a:t>
+            </a:r>
+            <a:r>
+              <a:rPr lang="en-US" altLang="ko-KR" dirty="0"/>
+              <a:t>.</a:t>
+            </a:r>
           </a:p>
           <a:p>
             <a:pPr marL="285750" indent="-285750">
@@ -5484,185 +5769,12 @@
               <a:buChar char="•"/>
             </a:pPr>
             <a:r>
-              <a:rPr lang="en-US" altLang="ko-KR" b="1" dirty="0"/>
-              <a:t>0.1</a:t>
-            </a:r>
-            <a:r>
-              <a:rPr lang="en-US" altLang="ko-KR" dirty="0"/>
-              <a:t> : </a:t>
-            </a:r>
-            <a:r>
-              <a:rPr lang="ko-KR" altLang="en-US" dirty="0"/>
-              <a:t>그리드 전체에 </a:t>
-            </a:r>
-            <a:r>
-              <a:rPr lang="en-US" altLang="ko-KR" dirty="0"/>
-              <a:t>Q</a:t>
-            </a:r>
-            <a:r>
-              <a:rPr lang="ko-KR" altLang="en-US" dirty="0"/>
-              <a:t>값이 넓게 형성</a:t>
-            </a:r>
-            <a:r>
-              <a:rPr lang="en-US" altLang="ko-KR" dirty="0"/>
-              <a:t>. Greedy</a:t>
-            </a:r>
-            <a:r>
-              <a:rPr lang="ko-KR" altLang="en-US" dirty="0"/>
-              <a:t> </a:t>
-            </a:r>
-            <a:r>
-              <a:rPr lang="en-US" altLang="ko-KR" dirty="0"/>
-              <a:t>Action</a:t>
-            </a:r>
-            <a:r>
-              <a:rPr lang="ko-KR" altLang="en-US" dirty="0"/>
-              <a:t> </a:t>
-            </a:r>
-            <a:r>
-              <a:rPr lang="en-US" altLang="ko-KR" dirty="0"/>
-              <a:t>92.5% </a:t>
-            </a:r>
-            <a:r>
-              <a:rPr lang="ko-KR" altLang="en-US" dirty="0"/>
-              <a:t>선택</a:t>
-            </a:r>
-            <a:r>
-              <a:rPr lang="en-US" altLang="ko-KR" dirty="0"/>
-              <a:t>, </a:t>
-            </a:r>
-            <a:r>
-              <a:rPr lang="ko-KR" altLang="en-US" dirty="0"/>
-              <a:t>나머지 행동을 일정 확률로 탐색해 비교적 다양한 </a:t>
-            </a:r>
-            <a:r>
-              <a:rPr lang="en-US" altLang="ko-KR" dirty="0"/>
-              <a:t>State Action</a:t>
-            </a:r>
-            <a:r>
-              <a:rPr lang="ko-KR" altLang="en-US" dirty="0"/>
-              <a:t>의 </a:t>
-            </a:r>
-            <a:r>
-              <a:rPr lang="en-US" altLang="ko-KR" dirty="0"/>
-              <a:t>Q</a:t>
-            </a:r>
-            <a:r>
-              <a:rPr lang="ko-KR" altLang="en-US" dirty="0"/>
-              <a:t>값 형성</a:t>
-            </a:r>
-            <a:endParaRPr lang="en-US" altLang="ko-KR" dirty="0"/>
-          </a:p>
-          <a:p>
-            <a:pPr marL="285750" indent="-285750">
-              <a:buFont typeface="Arial" panose="020B0604020202020204" pitchFamily="34" charset="0"/>
-              <a:buChar char="•"/>
-            </a:pPr>
-            <a:r>
-              <a:rPr lang="en-US" altLang="ko-KR" b="1" dirty="0"/>
-              <a:t>0.3</a:t>
-            </a:r>
-            <a:r>
-              <a:rPr lang="en-US" altLang="ko-KR" dirty="0"/>
-              <a:t> : Q</a:t>
-            </a:r>
-            <a:r>
-              <a:rPr lang="ko-KR" altLang="en-US" dirty="0"/>
-              <a:t>값 분포 변화</a:t>
-            </a:r>
-            <a:r>
-              <a:rPr lang="en-US" altLang="ko-KR" dirty="0"/>
-              <a:t>. </a:t>
-            </a:r>
-            <a:r>
-              <a:rPr lang="ko-KR" altLang="en-US" dirty="0"/>
-              <a:t>엡실론이 커지면서 강한 </a:t>
-            </a:r>
-            <a:r>
-              <a:rPr lang="ko-KR" altLang="en-US" dirty="0" err="1"/>
-              <a:t>음수값</a:t>
-            </a:r>
-            <a:r>
-              <a:rPr lang="ko-KR" altLang="en-US" dirty="0"/>
-              <a:t> 발생</a:t>
-            </a:r>
-            <a:r>
-              <a:rPr lang="en-US" altLang="ko-KR" dirty="0"/>
-              <a:t>, </a:t>
-            </a:r>
-            <a:r>
-              <a:rPr lang="ko-KR" altLang="en-US" dirty="0"/>
-              <a:t>여러 </a:t>
-            </a:r>
-            <a:r>
-              <a:rPr lang="en-US" altLang="ko-KR" dirty="0"/>
-              <a:t>Action</a:t>
-            </a:r>
-            <a:r>
-              <a:rPr lang="ko-KR" altLang="en-US" dirty="0"/>
-              <a:t>을 경험해 </a:t>
-            </a:r>
-            <a:r>
-              <a:rPr lang="en-US" altLang="ko-KR" dirty="0"/>
-              <a:t>State</a:t>
-            </a:r>
-            <a:r>
-              <a:rPr lang="ko-KR" altLang="en-US" dirty="0"/>
-              <a:t>별 </a:t>
-            </a:r>
-            <a:r>
-              <a:rPr lang="en-US" altLang="ko-KR" dirty="0"/>
-              <a:t>Q</a:t>
-            </a:r>
-            <a:r>
-              <a:rPr lang="ko-KR" altLang="en-US" dirty="0"/>
-              <a:t>값 차이 나타남</a:t>
-            </a:r>
-            <a:r>
-              <a:rPr lang="en-US" altLang="ko-KR" dirty="0"/>
-              <a:t>.</a:t>
-            </a:r>
-          </a:p>
-          <a:p>
-            <a:pPr marL="285750" indent="-285750">
-              <a:buFont typeface="Arial" panose="020B0604020202020204" pitchFamily="34" charset="0"/>
-              <a:buChar char="•"/>
-            </a:pPr>
-            <a:r>
-              <a:rPr lang="en-US" altLang="ko-KR" b="1" dirty="0"/>
-              <a:t>0.5</a:t>
-            </a:r>
-            <a:r>
-              <a:rPr lang="en-US" altLang="ko-KR" dirty="0"/>
-              <a:t> : Greedy Action</a:t>
-            </a:r>
-            <a:r>
-              <a:rPr lang="ko-KR" altLang="en-US" dirty="0"/>
-              <a:t> 선택 확률 </a:t>
-            </a:r>
-            <a:r>
-              <a:rPr lang="en-US" altLang="ko-KR" dirty="0"/>
-              <a:t>62.5%</a:t>
-            </a:r>
-            <a:r>
-              <a:rPr lang="ko-KR" altLang="en-US" dirty="0"/>
-              <a:t>까지 감소해 탐색 비중 증가</a:t>
-            </a:r>
-            <a:r>
-              <a:rPr lang="en-US" altLang="ko-KR" dirty="0"/>
-              <a:t>. </a:t>
-            </a:r>
-            <a:r>
-              <a:rPr lang="ko-KR" altLang="en-US" dirty="0"/>
-              <a:t>좋은 </a:t>
-            </a:r>
-            <a:r>
-              <a:rPr lang="en-US" altLang="ko-KR" dirty="0"/>
-              <a:t>Policy</a:t>
-            </a:r>
-            <a:r>
-              <a:rPr lang="ko-KR" altLang="en-US" dirty="0"/>
-              <a:t> 활용 못해 </a:t>
+              <a:rPr lang="en-US" altLang="ko-KR" dirty="0"/>
+              <a:t>Epsilon 0.01~0.1</a:t>
+            </a:r>
+            <a:r>
+              <a:rPr lang="ko-KR" altLang="en-US" dirty="0"/>
+              <a:t>에서 높은 </a:t>
             </a:r>
             <a:r>
               <a:rPr lang="en-US" altLang="ko-KR" dirty="0"/>
@@ -5670,15 +5782,15 @@
             </a:r>
             <a:r>
               <a:rPr lang="ko-KR" altLang="en-US" dirty="0"/>
-              <a:t>이 불안정해지고 최종 </a:t>
-            </a:r>
-            <a:r>
-              <a:rPr lang="en-US" altLang="ko-KR" dirty="0"/>
-              <a:t>Greedy Policy</a:t>
-            </a:r>
-            <a:r>
-              <a:rPr lang="ko-KR" altLang="en-US" dirty="0"/>
-              <a:t> 변동성 증가</a:t>
+              <a:t>이 관찰되었고</a:t>
+            </a:r>
+            <a:r>
+              <a:rPr lang="en-US" altLang="ko-KR" dirty="0"/>
+              <a:t>, 0.3 </a:t>
+            </a:r>
+            <a:r>
+              <a:rPr lang="ko-KR" altLang="en-US" dirty="0"/>
+              <a:t>이상에서는 탐색 증가에 따른 성능 저하 발생</a:t>
             </a:r>
           </a:p>
         </p:txBody>
@@ -5686,7 +5798,7 @@
     </p:spTree>
     <p:extLst>
       <p:ext uri="{BB962C8B-B14F-4D97-AF65-F5344CB8AC3E}">
-        <p14:creationId xmlns:p14="http://schemas.microsoft.com/office/powerpoint/2010/main" val="445456064"/>
+        <p14:creationId xmlns:p14="http://schemas.microsoft.com/office/powerpoint/2010/main" val="1540457056"/>
       </p:ext>
     </p:extLst>
   </p:cSld>
@@ -5772,6 +5884,481 @@
             </a:pPr>
             <a:r>
               <a:rPr lang="en-US" altLang="ko-KR" b="1" dirty="0"/>
+              <a:t>Monte Carlo Method - Epsilon</a:t>
+            </a:r>
+            <a:endParaRPr lang="ko-KR" altLang="en-US" b="1" dirty="0"/>
+          </a:p>
+        </p:txBody>
+      </p:sp>
+      <p:sp>
+        <p:nvSpPr>
+          <p:cNvPr id="4" name="TextBox 3">
+            <a:extLst>
+              <a:ext uri="{FF2B5EF4-FFF2-40B4-BE49-F238E27FC236}">
+                <a16:creationId xmlns:a16="http://schemas.microsoft.com/office/drawing/2014/main" id="{FD667B59-952B-A6C2-1647-BE025B36AA19}"/>
+              </a:ext>
+            </a:extLst>
+          </p:cNvPr>
+          <p:cNvSpPr txBox="1"/>
+          <p:nvPr/>
+        </p:nvSpPr>
+        <p:spPr>
+          <a:xfrm>
+            <a:off x="951738" y="2387272"/>
+            <a:ext cx="10402062" cy="3139321"/>
+          </a:xfrm>
+          <a:prstGeom prst="rect">
+            <a:avLst/>
+          </a:prstGeom>
+          <a:noFill/>
+        </p:spPr>
+        <p:txBody>
+          <a:bodyPr wrap="square" rtlCol="0">
+            <a:spAutoFit/>
+          </a:bodyPr>
+          <a:lstStyle/>
+          <a:p>
+            <a:pPr marL="285750" indent="-285750">
+              <a:buFont typeface="Arial" panose="020B0604020202020204" pitchFamily="34" charset="0"/>
+              <a:buChar char="•"/>
+            </a:pPr>
+            <a:r>
+              <a:rPr lang="ko-KR" altLang="en-US" dirty="0"/>
+              <a:t>엡실론은 비율 결정</a:t>
+            </a:r>
+            <a:r>
+              <a:rPr lang="en-US" altLang="ko-KR" dirty="0"/>
+              <a:t>. </a:t>
+            </a:r>
+            <a:r>
+              <a:rPr lang="ko-KR" altLang="en-US" dirty="0"/>
+              <a:t>크기가 커질 수록 현재 </a:t>
+            </a:r>
+            <a:r>
+              <a:rPr lang="en-US" altLang="ko-KR" dirty="0"/>
+              <a:t>Greedy Action</a:t>
+            </a:r>
+            <a:r>
+              <a:rPr lang="ko-KR" altLang="en-US" dirty="0"/>
+              <a:t> 이외 행동을 선택할 확률 증가</a:t>
+            </a:r>
+            <a:endParaRPr lang="en-US" altLang="ko-KR" dirty="0"/>
+          </a:p>
+          <a:p>
+            <a:pPr marL="285750" indent="-285750">
+              <a:buFont typeface="Arial" panose="020B0604020202020204" pitchFamily="34" charset="0"/>
+              <a:buChar char="•"/>
+            </a:pPr>
+            <a:r>
+              <a:rPr lang="en-US" altLang="ko-KR" b="1" dirty="0"/>
+              <a:t>0.01</a:t>
+            </a:r>
+            <a:r>
+              <a:rPr lang="en-US" altLang="ko-KR" dirty="0"/>
+              <a:t> : </a:t>
+            </a:r>
+            <a:r>
+              <a:rPr lang="ko-KR" altLang="en-US" dirty="0"/>
+              <a:t>주로 실제 이동 경로</a:t>
+            </a:r>
+            <a:r>
+              <a:rPr lang="en-US" altLang="ko-KR" dirty="0"/>
+              <a:t>. </a:t>
+            </a:r>
+            <a:r>
+              <a:rPr lang="ko-KR" altLang="en-US" dirty="0"/>
+              <a:t>탐색 확률이 낮아 기존에 높은 </a:t>
+            </a:r>
+            <a:r>
+              <a:rPr lang="en-US" altLang="ko-KR" dirty="0"/>
+              <a:t>Q</a:t>
+            </a:r>
+            <a:r>
+              <a:rPr lang="ko-KR" altLang="en-US" dirty="0"/>
+              <a:t>값을 가진 행동을 반복적으로 선택</a:t>
+            </a:r>
+            <a:r>
+              <a:rPr lang="en-US" altLang="ko-KR" dirty="0"/>
+              <a:t>, </a:t>
+            </a:r>
+            <a:r>
+              <a:rPr lang="ko-KR" altLang="en-US" dirty="0"/>
+              <a:t>일부 </a:t>
+            </a:r>
+            <a:r>
+              <a:rPr lang="en-US" altLang="ko-KR" dirty="0"/>
+              <a:t>State Action</a:t>
+            </a:r>
+            <a:r>
+              <a:rPr lang="ko-KR" altLang="en-US" dirty="0"/>
+              <a:t>은 탐색되지 않아 </a:t>
+            </a:r>
+            <a:r>
+              <a:rPr lang="en-US" altLang="ko-KR" dirty="0"/>
+              <a:t>Q</a:t>
+            </a:r>
+            <a:r>
+              <a:rPr lang="ko-KR" altLang="en-US" dirty="0"/>
+              <a:t>값이 </a:t>
+            </a:r>
+            <a:r>
+              <a:rPr lang="en-US" altLang="ko-KR" dirty="0"/>
+              <a:t>0</a:t>
+            </a:r>
+            <a:r>
+              <a:rPr lang="ko-KR" altLang="en-US" dirty="0"/>
+              <a:t> 근처</a:t>
+            </a:r>
+            <a:r>
+              <a:rPr lang="en-US" altLang="ko-KR" dirty="0"/>
+              <a:t>.</a:t>
+            </a:r>
+          </a:p>
+          <a:p>
+            <a:pPr marL="285750" indent="-285750">
+              <a:buFont typeface="Arial" panose="020B0604020202020204" pitchFamily="34" charset="0"/>
+              <a:buChar char="•"/>
+            </a:pPr>
+            <a:r>
+              <a:rPr lang="en-US" altLang="ko-KR" b="1" dirty="0"/>
+              <a:t>0.05</a:t>
+            </a:r>
+            <a:r>
+              <a:rPr lang="en-US" altLang="ko-KR" dirty="0"/>
+              <a:t> : 0.01</a:t>
+            </a:r>
+            <a:r>
+              <a:rPr lang="ko-KR" altLang="en-US" dirty="0"/>
+              <a:t>보다 탐색 빈도가 증가해 더 많은 </a:t>
+            </a:r>
+            <a:r>
+              <a:rPr lang="en-US" altLang="ko-KR" dirty="0"/>
+              <a:t>State Action</a:t>
+            </a:r>
+            <a:r>
+              <a:rPr lang="ko-KR" altLang="en-US" dirty="0"/>
+              <a:t>의 </a:t>
+            </a:r>
+            <a:r>
+              <a:rPr lang="en-US" altLang="ko-KR" dirty="0"/>
+              <a:t>Q</a:t>
+            </a:r>
+            <a:r>
+              <a:rPr lang="ko-KR" altLang="en-US" dirty="0"/>
+              <a:t>값 갱신</a:t>
+            </a:r>
+            <a:r>
+              <a:rPr lang="en-US" altLang="ko-KR" dirty="0"/>
+              <a:t>. </a:t>
+            </a:r>
+            <a:r>
+              <a:rPr lang="ko-KR" altLang="en-US" dirty="0"/>
+              <a:t>이에 따라 </a:t>
+            </a:r>
+            <a:r>
+              <a:rPr lang="en-US" altLang="ko-KR" dirty="0"/>
+              <a:t>Greedy Policy </a:t>
+            </a:r>
+            <a:r>
+              <a:rPr lang="ko-KR" altLang="en-US" dirty="0"/>
+              <a:t>일부 방향 변화</a:t>
+            </a:r>
+            <a:endParaRPr lang="en-US" altLang="ko-KR" dirty="0"/>
+          </a:p>
+          <a:p>
+            <a:pPr marL="285750" indent="-285750">
+              <a:buFont typeface="Arial" panose="020B0604020202020204" pitchFamily="34" charset="0"/>
+              <a:buChar char="•"/>
+            </a:pPr>
+            <a:r>
+              <a:rPr lang="en-US" altLang="ko-KR" b="1" dirty="0"/>
+              <a:t>0.1</a:t>
+            </a:r>
+            <a:r>
+              <a:rPr lang="en-US" altLang="ko-KR" dirty="0"/>
+              <a:t> : </a:t>
+            </a:r>
+            <a:r>
+              <a:rPr lang="ko-KR" altLang="en-US" dirty="0"/>
+              <a:t>그리드 전체에 </a:t>
+            </a:r>
+            <a:r>
+              <a:rPr lang="en-US" altLang="ko-KR" dirty="0"/>
+              <a:t>Q</a:t>
+            </a:r>
+            <a:r>
+              <a:rPr lang="ko-KR" altLang="en-US" dirty="0"/>
+              <a:t>값이 넓게 형성</a:t>
+            </a:r>
+            <a:r>
+              <a:rPr lang="en-US" altLang="ko-KR" dirty="0"/>
+              <a:t>. Greedy</a:t>
+            </a:r>
+            <a:r>
+              <a:rPr lang="ko-KR" altLang="en-US" dirty="0"/>
+              <a:t> </a:t>
+            </a:r>
+            <a:r>
+              <a:rPr lang="en-US" altLang="ko-KR" dirty="0"/>
+              <a:t>Action</a:t>
+            </a:r>
+            <a:r>
+              <a:rPr lang="ko-KR" altLang="en-US" dirty="0"/>
+              <a:t> </a:t>
+            </a:r>
+            <a:r>
+              <a:rPr lang="en-US" altLang="ko-KR" dirty="0"/>
+              <a:t>92.5% </a:t>
+            </a:r>
+            <a:r>
+              <a:rPr lang="ko-KR" altLang="en-US" dirty="0"/>
+              <a:t>선택</a:t>
+            </a:r>
+            <a:r>
+              <a:rPr lang="en-US" altLang="ko-KR" dirty="0"/>
+              <a:t>, </a:t>
+            </a:r>
+            <a:r>
+              <a:rPr lang="ko-KR" altLang="en-US" dirty="0"/>
+              <a:t>나머지 행동을 일정 확률로 탐색해 비교적 다양한 </a:t>
+            </a:r>
+            <a:r>
+              <a:rPr lang="en-US" altLang="ko-KR" dirty="0"/>
+              <a:t>State Action</a:t>
+            </a:r>
+            <a:r>
+              <a:rPr lang="ko-KR" altLang="en-US" dirty="0"/>
+              <a:t>의 </a:t>
+            </a:r>
+            <a:r>
+              <a:rPr lang="en-US" altLang="ko-KR" dirty="0"/>
+              <a:t>Q</a:t>
+            </a:r>
+            <a:r>
+              <a:rPr lang="ko-KR" altLang="en-US" dirty="0"/>
+              <a:t>값 형성</a:t>
+            </a:r>
+            <a:endParaRPr lang="en-US" altLang="ko-KR" dirty="0"/>
+          </a:p>
+          <a:p>
+            <a:pPr marL="285750" indent="-285750">
+              <a:buFont typeface="Arial" panose="020B0604020202020204" pitchFamily="34" charset="0"/>
+              <a:buChar char="•"/>
+            </a:pPr>
+            <a:r>
+              <a:rPr lang="en-US" altLang="ko-KR" b="1" dirty="0"/>
+              <a:t>0.3</a:t>
+            </a:r>
+            <a:r>
+              <a:rPr lang="en-US" altLang="ko-KR" dirty="0"/>
+              <a:t> : Q</a:t>
+            </a:r>
+            <a:r>
+              <a:rPr lang="ko-KR" altLang="en-US" dirty="0"/>
+              <a:t>값 분포 변화</a:t>
+            </a:r>
+            <a:r>
+              <a:rPr lang="en-US" altLang="ko-KR" dirty="0"/>
+              <a:t>. </a:t>
+            </a:r>
+            <a:r>
+              <a:rPr lang="ko-KR" altLang="en-US" dirty="0"/>
+              <a:t>엡실론이 커지면서 강한 </a:t>
+            </a:r>
+            <a:r>
+              <a:rPr lang="ko-KR" altLang="en-US" dirty="0" err="1"/>
+              <a:t>음수값</a:t>
+            </a:r>
+            <a:r>
+              <a:rPr lang="ko-KR" altLang="en-US" dirty="0"/>
+              <a:t> 발생</a:t>
+            </a:r>
+            <a:r>
+              <a:rPr lang="en-US" altLang="ko-KR" dirty="0"/>
+              <a:t>, </a:t>
+            </a:r>
+            <a:r>
+              <a:rPr lang="ko-KR" altLang="en-US" dirty="0"/>
+              <a:t>여러 </a:t>
+            </a:r>
+            <a:r>
+              <a:rPr lang="en-US" altLang="ko-KR" dirty="0"/>
+              <a:t>Action</a:t>
+            </a:r>
+            <a:r>
+              <a:rPr lang="ko-KR" altLang="en-US" dirty="0"/>
+              <a:t>을 경험해 </a:t>
+            </a:r>
+            <a:r>
+              <a:rPr lang="en-US" altLang="ko-KR" dirty="0"/>
+              <a:t>State</a:t>
+            </a:r>
+            <a:r>
+              <a:rPr lang="ko-KR" altLang="en-US" dirty="0"/>
+              <a:t>별 </a:t>
+            </a:r>
+            <a:r>
+              <a:rPr lang="en-US" altLang="ko-KR" dirty="0"/>
+              <a:t>Q</a:t>
+            </a:r>
+            <a:r>
+              <a:rPr lang="ko-KR" altLang="en-US" dirty="0"/>
+              <a:t>값 차이 나타남</a:t>
+            </a:r>
+            <a:r>
+              <a:rPr lang="en-US" altLang="ko-KR" dirty="0"/>
+              <a:t>.</a:t>
+            </a:r>
+          </a:p>
+          <a:p>
+            <a:pPr marL="285750" indent="-285750">
+              <a:buFont typeface="Arial" panose="020B0604020202020204" pitchFamily="34" charset="0"/>
+              <a:buChar char="•"/>
+            </a:pPr>
+            <a:r>
+              <a:rPr lang="en-US" altLang="ko-KR" b="1" dirty="0"/>
+              <a:t>0.5</a:t>
+            </a:r>
+            <a:r>
+              <a:rPr lang="en-US" altLang="ko-KR" dirty="0"/>
+              <a:t> : Greedy Action</a:t>
+            </a:r>
+            <a:r>
+              <a:rPr lang="ko-KR" altLang="en-US" dirty="0"/>
+              <a:t> 선택 확률 </a:t>
+            </a:r>
+            <a:r>
+              <a:rPr lang="en-US" altLang="ko-KR" dirty="0"/>
+              <a:t>62.5%</a:t>
+            </a:r>
+            <a:r>
+              <a:rPr lang="ko-KR" altLang="en-US" dirty="0"/>
+              <a:t>까지 감소해 탐색 비중 증가</a:t>
+            </a:r>
+            <a:r>
+              <a:rPr lang="en-US" altLang="ko-KR" dirty="0"/>
+              <a:t>. </a:t>
+            </a:r>
+            <a:r>
+              <a:rPr lang="ko-KR" altLang="en-US" dirty="0"/>
+              <a:t>좋은 </a:t>
+            </a:r>
+            <a:r>
+              <a:rPr lang="en-US" altLang="ko-KR" dirty="0"/>
+              <a:t>Policy</a:t>
+            </a:r>
+            <a:r>
+              <a:rPr lang="ko-KR" altLang="en-US" dirty="0"/>
+              <a:t> 활용 못해 </a:t>
+            </a:r>
+            <a:r>
+              <a:rPr lang="en-US" altLang="ko-KR" dirty="0"/>
+              <a:t>Return</a:t>
+            </a:r>
+            <a:r>
+              <a:rPr lang="ko-KR" altLang="en-US" dirty="0"/>
+              <a:t>이 불안정해지고 최종 </a:t>
+            </a:r>
+            <a:r>
+              <a:rPr lang="en-US" altLang="ko-KR" dirty="0"/>
+              <a:t>Greedy Policy</a:t>
+            </a:r>
+            <a:r>
+              <a:rPr lang="ko-KR" altLang="en-US" dirty="0"/>
+              <a:t> 변동성 증가</a:t>
+            </a:r>
+          </a:p>
+        </p:txBody>
+      </p:sp>
+    </p:spTree>
+    <p:extLst>
+      <p:ext uri="{BB962C8B-B14F-4D97-AF65-F5344CB8AC3E}">
+        <p14:creationId xmlns:p14="http://schemas.microsoft.com/office/powerpoint/2010/main" val="445456064"/>
+      </p:ext>
+    </p:extLst>
+  </p:cSld>
+  <p:clrMapOvr>
+    <a:masterClrMapping/>
+  </p:clrMapOvr>
+</p:sld>
+</file>
+
+<file path=ppt/slides/slide7.xml><?xml version="1.0" encoding="utf-8"?>
+<p:sld xmlns:a="http://schemas.openxmlformats.org/drawingml/2006/main" xmlns:r="http://schemas.openxmlformats.org/officeDocument/2006/relationships" xmlns:p="http://schemas.openxmlformats.org/presentationml/2006/main">
+  <p:cSld>
+    <p:spTree>
+      <p:nvGrpSpPr>
+        <p:cNvPr id="1" name=""/>
+        <p:cNvGrpSpPr/>
+        <p:nvPr/>
+      </p:nvGrpSpPr>
+      <p:grpSpPr>
+        <a:xfrm>
+          <a:off x="0" y="0"/>
+          <a:ext cx="0" cy="0"/>
+          <a:chOff x="0" y="0"/>
+          <a:chExt cx="0" cy="0"/>
+        </a:xfrm>
+      </p:grpSpPr>
+      <p:sp>
+        <p:nvSpPr>
+          <p:cNvPr id="2" name="제목 1">
+            <a:extLst>
+              <a:ext uri="{FF2B5EF4-FFF2-40B4-BE49-F238E27FC236}">
+                <a16:creationId xmlns:a16="http://schemas.microsoft.com/office/drawing/2014/main" id="{05F47E05-2409-F2F5-E759-8FF54D92678B}"/>
+              </a:ext>
+            </a:extLst>
+          </p:cNvPr>
+          <p:cNvSpPr>
+            <a:spLocks noGrp="1"/>
+          </p:cNvSpPr>
+          <p:nvPr>
+            <p:ph type="title"/>
+          </p:nvPr>
+        </p:nvSpPr>
+        <p:spPr/>
+        <p:txBody>
+          <a:bodyPr/>
+          <a:lstStyle/>
+          <a:p>
+            <a:r>
+              <a:rPr lang="ko-KR" altLang="en-US" dirty="0"/>
+              <a:t>과제 풀이</a:t>
+            </a:r>
+          </a:p>
+        </p:txBody>
+      </p:sp>
+      <p:sp>
+        <p:nvSpPr>
+          <p:cNvPr id="3" name="내용 개체 틀 2">
+            <a:extLst>
+              <a:ext uri="{FF2B5EF4-FFF2-40B4-BE49-F238E27FC236}">
+                <a16:creationId xmlns:a16="http://schemas.microsoft.com/office/drawing/2014/main" id="{5852B724-E47B-9C14-9E1F-E5FE5A5B6B63}"/>
+              </a:ext>
+            </a:extLst>
+          </p:cNvPr>
+          <p:cNvSpPr>
+            <a:spLocks noGrp="1"/>
+          </p:cNvSpPr>
+          <p:nvPr>
+            <p:ph idx="1"/>
+          </p:nvPr>
+        </p:nvSpPr>
+        <p:spPr>
+          <a:xfrm>
+            <a:off x="838200" y="1825625"/>
+            <a:ext cx="5501640" cy="4351338"/>
+          </a:xfrm>
+        </p:spPr>
+        <p:txBody>
+          <a:bodyPr/>
+          <a:lstStyle/>
+          <a:p>
+            <a:pPr marL="0" indent="0">
+              <a:buNone/>
+            </a:pPr>
+            <a:r>
+              <a:rPr lang="en-US" altLang="ko-KR" b="1" dirty="0"/>
               <a:t>Monte Carlo Method - alpha</a:t>
             </a:r>
             <a:endParaRPr lang="ko-KR" altLang="en-US" b="1" dirty="0"/>
@@ -5793,7 +6380,7 @@
           <p:nvPr>
             <p:extLst>
               <p:ext uri="{D42A27DB-BD31-4B8C-83A1-F6EECF244321}">
-                <p14:modId xmlns:p14="http://schemas.microsoft.com/office/powerpoint/2010/main" val="1762307807"/>
+                <p14:modId xmlns:p14="http://schemas.microsoft.com/office/powerpoint/2010/main" val="805918756"/>
               </p:ext>
             </p:extLst>
           </p:nvPr>
@@ -6076,635 +6663,6 @@
 </p:sld>
 </file>
 
-<file path=ppt/slides/slide7.xml><?xml version="1.0" encoding="utf-8"?>
-<p:sld xmlns:a="http://schemas.openxmlformats.org/drawingml/2006/main" xmlns:r="http://schemas.openxmlformats.org/officeDocument/2006/relationships" xmlns:p="http://schemas.openxmlformats.org/presentationml/2006/main">
-  <p:cSld>
-    <p:spTree>
-      <p:nvGrpSpPr>
-        <p:cNvPr id="1" name=""/>
-        <p:cNvGrpSpPr/>
-        <p:nvPr/>
-      </p:nvGrpSpPr>
-      <p:grpSpPr>
-        <a:xfrm>
-          <a:off x="0" y="0"/>
-          <a:ext cx="0" cy="0"/>
-          <a:chOff x="0" y="0"/>
-          <a:chExt cx="0" cy="0"/>
-        </a:xfrm>
-      </p:grpSpPr>
-      <p:sp>
-        <p:nvSpPr>
-          <p:cNvPr id="2" name="제목 1">
-            <a:extLst>
-              <a:ext uri="{FF2B5EF4-FFF2-40B4-BE49-F238E27FC236}">
-                <a16:creationId xmlns:a16="http://schemas.microsoft.com/office/drawing/2014/main" id="{05F47E05-2409-F2F5-E759-8FF54D92678B}"/>
-              </a:ext>
-            </a:extLst>
-          </p:cNvPr>
-          <p:cNvSpPr>
-            <a:spLocks noGrp="1"/>
-          </p:cNvSpPr>
-          <p:nvPr>
-            <p:ph type="title"/>
-          </p:nvPr>
-        </p:nvSpPr>
-        <p:spPr/>
-        <p:txBody>
-          <a:bodyPr/>
-          <a:lstStyle/>
-          <a:p>
-            <a:r>
-              <a:rPr lang="ko-KR" altLang="en-US" dirty="0"/>
-              <a:t>과제 풀이</a:t>
-            </a:r>
-          </a:p>
-        </p:txBody>
-      </p:sp>
-      <p:sp>
-        <p:nvSpPr>
-          <p:cNvPr id="3" name="내용 개체 틀 2">
-            <a:extLst>
-              <a:ext uri="{FF2B5EF4-FFF2-40B4-BE49-F238E27FC236}">
-                <a16:creationId xmlns:a16="http://schemas.microsoft.com/office/drawing/2014/main" id="{5852B724-E47B-9C14-9E1F-E5FE5A5B6B63}"/>
-              </a:ext>
-            </a:extLst>
-          </p:cNvPr>
-          <p:cNvSpPr>
-            <a:spLocks noGrp="1"/>
-          </p:cNvSpPr>
-          <p:nvPr>
-            <p:ph idx="1"/>
-          </p:nvPr>
-        </p:nvSpPr>
-        <p:spPr>
-          <a:xfrm>
-            <a:off x="838200" y="1825625"/>
-            <a:ext cx="5501640" cy="4351338"/>
-          </a:xfrm>
-        </p:spPr>
-        <p:txBody>
-          <a:bodyPr/>
-          <a:lstStyle/>
-          <a:p>
-            <a:pPr marL="0" indent="0">
-              <a:buNone/>
-            </a:pPr>
-            <a:r>
-              <a:rPr lang="en-US" altLang="ko-KR" b="1" dirty="0"/>
-              <a:t>Monte Carlo Method - alpha</a:t>
-            </a:r>
-            <a:endParaRPr lang="ko-KR" altLang="en-US" b="1" dirty="0"/>
-          </a:p>
-        </p:txBody>
-      </p:sp>
-      <p:sp>
-        <p:nvSpPr>
-          <p:cNvPr id="4" name="TextBox 3">
-            <a:extLst>
-              <a:ext uri="{FF2B5EF4-FFF2-40B4-BE49-F238E27FC236}">
-                <a16:creationId xmlns:a16="http://schemas.microsoft.com/office/drawing/2014/main" id="{742F8D02-3666-D697-123F-252D611E4339}"/>
-              </a:ext>
-            </a:extLst>
-          </p:cNvPr>
-          <p:cNvSpPr txBox="1"/>
-          <p:nvPr/>
-        </p:nvSpPr>
-        <p:spPr>
-          <a:xfrm>
-            <a:off x="433086" y="2204646"/>
-            <a:ext cx="11532772" cy="3970318"/>
-          </a:xfrm>
-          <a:prstGeom prst="rect">
-            <a:avLst/>
-          </a:prstGeom>
-          <a:noFill/>
-        </p:spPr>
-        <p:txBody>
-          <a:bodyPr wrap="square" rtlCol="0">
-            <a:spAutoFit/>
-          </a:bodyPr>
-          <a:lstStyle/>
-          <a:p>
-            <a:pPr marL="285750" indent="-285750">
-              <a:buFont typeface="Arial" panose="020B0604020202020204" pitchFamily="34" charset="0"/>
-              <a:buChar char="•"/>
-            </a:pPr>
-            <a:r>
-              <a:rPr lang="en-US" altLang="ko-KR" dirty="0"/>
-              <a:t>Alpha</a:t>
-            </a:r>
-            <a:r>
-              <a:rPr lang="ko-KR" altLang="en-US" dirty="0"/>
-              <a:t>는 해당 </a:t>
-            </a:r>
-            <a:r>
-              <a:rPr lang="en-US" altLang="ko-KR" dirty="0"/>
-              <a:t>Episode</a:t>
-            </a:r>
-            <a:r>
-              <a:rPr lang="ko-KR" altLang="en-US" dirty="0"/>
-              <a:t>에서 얻은 </a:t>
-            </a:r>
-            <a:r>
-              <a:rPr lang="en-US" altLang="ko-KR" dirty="0"/>
-              <a:t>G</a:t>
-            </a:r>
-            <a:r>
-              <a:rPr lang="ko-KR" altLang="en-US" dirty="0"/>
-              <a:t>를 기존 </a:t>
-            </a:r>
-            <a:r>
-              <a:rPr lang="en-US" altLang="ko-KR" dirty="0"/>
-              <a:t>Q</a:t>
-            </a:r>
-            <a:r>
-              <a:rPr lang="ko-KR" altLang="en-US" dirty="0"/>
-              <a:t>에 얼마나 강하게 넣을 것인가</a:t>
-            </a:r>
-            <a:r>
-              <a:rPr lang="en-US" altLang="ko-KR" dirty="0"/>
-              <a:t>? </a:t>
-            </a:r>
-          </a:p>
-          <a:p>
-            <a:pPr marL="285750" indent="-285750">
-              <a:buFont typeface="Arial" panose="020B0604020202020204" pitchFamily="34" charset="0"/>
-              <a:buChar char="•"/>
-            </a:pPr>
-            <a:r>
-              <a:rPr lang="ko-KR" altLang="en-US" dirty="0"/>
-              <a:t>최신</a:t>
-            </a:r>
-            <a:r>
-              <a:rPr lang="en-US" altLang="ko-KR" dirty="0"/>
-              <a:t> Return</a:t>
-            </a:r>
-            <a:r>
-              <a:rPr lang="ko-KR" altLang="en-US" dirty="0"/>
-              <a:t>에 더 큰 가중치를 주는 </a:t>
-            </a:r>
-            <a:r>
-              <a:rPr lang="en-US" altLang="ko-KR" dirty="0"/>
-              <a:t>Exponential Moving Average</a:t>
-            </a:r>
-          </a:p>
-          <a:p>
-            <a:pPr marL="285750" indent="-285750">
-              <a:buFont typeface="Arial" panose="020B0604020202020204" pitchFamily="34" charset="0"/>
-              <a:buChar char="•"/>
-            </a:pPr>
-            <a:r>
-              <a:rPr lang="en-US" altLang="ko-KR" b="1" dirty="0"/>
-              <a:t>0.01</a:t>
-            </a:r>
-            <a:r>
-              <a:rPr lang="en-US" altLang="ko-KR" dirty="0"/>
-              <a:t> : </a:t>
-            </a:r>
-            <a:r>
-              <a:rPr lang="ko-KR" altLang="en-US" dirty="0" err="1"/>
-              <a:t>학습률이</a:t>
-            </a:r>
-            <a:r>
-              <a:rPr lang="ko-KR" altLang="en-US" dirty="0"/>
-              <a:t> 매우 작아 </a:t>
-            </a:r>
-            <a:r>
-              <a:rPr lang="en-US" altLang="ko-KR" dirty="0"/>
-              <a:t>Q</a:t>
-            </a:r>
-            <a:r>
-              <a:rPr lang="ko-KR" altLang="en-US" dirty="0"/>
-              <a:t>값 변화가 느리며</a:t>
-            </a:r>
-            <a:r>
-              <a:rPr lang="en-US" altLang="ko-KR" dirty="0"/>
-              <a:t>, </a:t>
-            </a:r>
-            <a:r>
-              <a:rPr lang="ko-KR" altLang="en-US" dirty="0"/>
-              <a:t>방문 횟수가 적은 </a:t>
-            </a:r>
-            <a:r>
-              <a:rPr lang="en-US" altLang="ko-KR" dirty="0"/>
-              <a:t>State-Action</a:t>
-            </a:r>
-            <a:r>
-              <a:rPr lang="ko-KR" altLang="en-US" dirty="0"/>
-              <a:t>은 초기값인 </a:t>
-            </a:r>
-            <a:r>
-              <a:rPr lang="en-US" altLang="ko-KR" dirty="0"/>
-              <a:t>0</a:t>
-            </a:r>
-            <a:r>
-              <a:rPr lang="ko-KR" altLang="en-US" dirty="0"/>
-              <a:t>근처에 머무를 가능성 증가</a:t>
-            </a:r>
-            <a:r>
-              <a:rPr lang="en-US" altLang="ko-KR" dirty="0"/>
-              <a:t>.</a:t>
-            </a:r>
-          </a:p>
-          <a:p>
-            <a:pPr marL="285750" indent="-285750">
-              <a:buFont typeface="Arial" panose="020B0604020202020204" pitchFamily="34" charset="0"/>
-              <a:buChar char="•"/>
-            </a:pPr>
-            <a:r>
-              <a:rPr lang="en-US" altLang="ko-KR" b="1" dirty="0"/>
-              <a:t>0.05</a:t>
-            </a:r>
-            <a:r>
-              <a:rPr lang="en-US" altLang="ko-KR" dirty="0"/>
-              <a:t> : 0.01</a:t>
-            </a:r>
-            <a:r>
-              <a:rPr lang="ko-KR" altLang="en-US" dirty="0"/>
-              <a:t>보다 </a:t>
-            </a:r>
-            <a:r>
-              <a:rPr lang="en-US" altLang="ko-KR" dirty="0"/>
-              <a:t>Q </a:t>
-            </a:r>
-            <a:r>
-              <a:rPr lang="ko-KR" altLang="en-US" dirty="0"/>
-              <a:t>오차 </a:t>
-            </a:r>
-            <a:r>
-              <a:rPr lang="ko-KR" altLang="en-US" dirty="0" err="1"/>
-              <a:t>갱신량</a:t>
-            </a:r>
-            <a:r>
-              <a:rPr lang="ko-KR" altLang="en-US" dirty="0"/>
-              <a:t> 반영 비율이 </a:t>
-            </a:r>
-            <a:r>
-              <a:rPr lang="en-US" altLang="ko-KR" dirty="0"/>
-              <a:t>5</a:t>
-            </a:r>
-            <a:r>
-              <a:rPr lang="ko-KR" altLang="en-US" dirty="0"/>
-              <a:t>배 커져 빠른 학습 진행</a:t>
-            </a:r>
-            <a:r>
-              <a:rPr lang="en-US" altLang="ko-KR" dirty="0"/>
-              <a:t>,</a:t>
-            </a:r>
-            <a:r>
-              <a:rPr lang="ko-KR" altLang="en-US" dirty="0"/>
-              <a:t> </a:t>
-            </a:r>
-            <a:r>
-              <a:rPr lang="en-US" altLang="ko-KR" dirty="0"/>
-              <a:t>State Action</a:t>
-            </a:r>
-            <a:r>
-              <a:rPr lang="ko-KR" altLang="en-US" dirty="0"/>
-              <a:t>간 </a:t>
-            </a:r>
-            <a:r>
-              <a:rPr lang="en-US" altLang="ko-KR" dirty="0"/>
-              <a:t>Q</a:t>
-            </a:r>
-            <a:r>
-              <a:rPr lang="ko-KR" altLang="en-US" dirty="0"/>
-              <a:t>값 차이가 더 </a:t>
-            </a:r>
-            <a:r>
-              <a:rPr lang="ko-KR" altLang="en-US" dirty="0" err="1"/>
-              <a:t>뚜렷해짐</a:t>
-            </a:r>
-            <a:r>
-              <a:rPr lang="en-US" altLang="ko-KR" dirty="0"/>
-              <a:t>.</a:t>
-            </a:r>
-          </a:p>
-          <a:p>
-            <a:pPr marL="285750" indent="-285750">
-              <a:buFont typeface="Arial" panose="020B0604020202020204" pitchFamily="34" charset="0"/>
-              <a:buChar char="•"/>
-            </a:pPr>
-            <a:r>
-              <a:rPr lang="en-US" altLang="ko-KR" b="1" dirty="0"/>
-              <a:t>0.1</a:t>
-            </a:r>
-            <a:r>
-              <a:rPr lang="en-US" altLang="ko-KR" dirty="0"/>
-              <a:t> : </a:t>
-            </a:r>
-            <a:r>
-              <a:rPr lang="ko-KR" altLang="en-US" dirty="0"/>
-              <a:t>그리드 전체에 큐 값이 넓게 형성</a:t>
-            </a:r>
-            <a:r>
-              <a:rPr lang="en-US" altLang="ko-KR" dirty="0"/>
-              <a:t>. </a:t>
-            </a:r>
-            <a:r>
-              <a:rPr lang="ko-KR" altLang="en-US" dirty="0"/>
-              <a:t>과거 </a:t>
-            </a:r>
-            <a:r>
-              <a:rPr lang="en-US" altLang="ko-KR" dirty="0"/>
-              <a:t>Q</a:t>
-            </a:r>
-            <a:r>
-              <a:rPr lang="ko-KR" altLang="en-US" dirty="0"/>
-              <a:t>값 </a:t>
-            </a:r>
-            <a:r>
-              <a:rPr lang="en-US" altLang="ko-KR" dirty="0"/>
-              <a:t>90%, </a:t>
-            </a:r>
-            <a:r>
-              <a:rPr lang="ko-KR" altLang="en-US" dirty="0"/>
-              <a:t>새로운 </a:t>
-            </a:r>
-            <a:r>
-              <a:rPr lang="en-US" altLang="ko-KR" dirty="0"/>
-              <a:t>G</a:t>
-            </a:r>
-            <a:r>
-              <a:rPr lang="ko-KR" altLang="en-US" dirty="0"/>
-              <a:t>값 </a:t>
-            </a:r>
-            <a:r>
-              <a:rPr lang="en-US" altLang="ko-KR" dirty="0"/>
-              <a:t>10% </a:t>
-            </a:r>
-            <a:r>
-              <a:rPr lang="ko-KR" altLang="en-US" dirty="0"/>
-              <a:t>반영</a:t>
-            </a:r>
-            <a:r>
-              <a:rPr lang="en-US" altLang="ko-KR" dirty="0"/>
-              <a:t>. </a:t>
-            </a:r>
-          </a:p>
-          <a:p>
-            <a:pPr marL="285750" indent="-285750">
-              <a:buFont typeface="Arial" panose="020B0604020202020204" pitchFamily="34" charset="0"/>
-              <a:buChar char="•"/>
-            </a:pPr>
-            <a:r>
-              <a:rPr lang="en-US" altLang="ko-KR" b="1" dirty="0"/>
-              <a:t>0.3</a:t>
-            </a:r>
-            <a:r>
-              <a:rPr lang="en-US" altLang="ko-KR" dirty="0"/>
-              <a:t> : </a:t>
-            </a:r>
-            <a:r>
-              <a:rPr lang="ko-KR" altLang="en-US" dirty="0"/>
-              <a:t>한 </a:t>
-            </a:r>
-            <a:r>
-              <a:rPr lang="en-US" altLang="ko-KR" dirty="0"/>
-              <a:t>Episode</a:t>
-            </a:r>
-            <a:r>
-              <a:rPr lang="ko-KR" altLang="en-US" dirty="0"/>
-              <a:t>의 </a:t>
-            </a:r>
-            <a:r>
-              <a:rPr lang="en-US" altLang="ko-KR" dirty="0"/>
-              <a:t>Return</a:t>
-            </a:r>
-            <a:r>
-              <a:rPr lang="ko-KR" altLang="en-US" dirty="0"/>
-              <a:t>이 </a:t>
-            </a:r>
-            <a:r>
-              <a:rPr lang="en-US" altLang="ko-KR" dirty="0"/>
-              <a:t>Q</a:t>
-            </a:r>
-            <a:r>
-              <a:rPr lang="ko-KR" altLang="en-US" dirty="0"/>
-              <a:t>에 미치는 영향 증가해</a:t>
-            </a:r>
-            <a:r>
-              <a:rPr lang="en-US" altLang="ko-KR" dirty="0"/>
-              <a:t> Return</a:t>
-            </a:r>
-            <a:r>
-              <a:rPr lang="ko-KR" altLang="en-US" dirty="0"/>
-              <a:t>에 따라 </a:t>
-            </a:r>
-            <a:r>
-              <a:rPr lang="en-US" altLang="ko-KR" dirty="0"/>
-              <a:t>Q</a:t>
-            </a:r>
-            <a:r>
-              <a:rPr lang="ko-KR" altLang="en-US" dirty="0"/>
-              <a:t>값이 빠르게 변화 </a:t>
-            </a:r>
-            <a:r>
-              <a:rPr lang="en-US" altLang="ko-KR" dirty="0"/>
-              <a:t>(</a:t>
-            </a:r>
-            <a:r>
-              <a:rPr lang="ko-KR" altLang="en-US" dirty="0"/>
-              <a:t>증가 및 감소</a:t>
-            </a:r>
-            <a:r>
-              <a:rPr lang="en-US" altLang="ko-KR" dirty="0"/>
-              <a:t>). 0.1</a:t>
-            </a:r>
-            <a:r>
-              <a:rPr lang="ko-KR" altLang="en-US" dirty="0"/>
-              <a:t>보다 </a:t>
-            </a:r>
-            <a:r>
-              <a:rPr lang="en-US" altLang="ko-KR" dirty="0"/>
-              <a:t>Q</a:t>
-            </a:r>
-            <a:r>
-              <a:rPr lang="ko-KR" altLang="en-US" dirty="0"/>
-              <a:t>값 변화폭 증가</a:t>
-            </a:r>
-            <a:endParaRPr lang="en-US" altLang="ko-KR" dirty="0"/>
-          </a:p>
-          <a:p>
-            <a:pPr marL="285750" indent="-285750">
-              <a:buFont typeface="Arial" panose="020B0604020202020204" pitchFamily="34" charset="0"/>
-              <a:buChar char="•"/>
-            </a:pPr>
-            <a:r>
-              <a:rPr lang="en-US" altLang="ko-KR" b="1" dirty="0"/>
-              <a:t>0.5</a:t>
-            </a:r>
-            <a:r>
-              <a:rPr lang="en-US" altLang="ko-KR" dirty="0"/>
-              <a:t> : </a:t>
-            </a:r>
-            <a:r>
-              <a:rPr lang="ko-KR" altLang="en-US" dirty="0"/>
-              <a:t>한 번의 </a:t>
-            </a:r>
-            <a:r>
-              <a:rPr lang="en-US" altLang="ko-KR" dirty="0"/>
-              <a:t>Return</a:t>
-            </a:r>
-            <a:r>
-              <a:rPr lang="ko-KR" altLang="en-US" dirty="0"/>
-              <a:t>이 새로운 </a:t>
-            </a:r>
-            <a:r>
-              <a:rPr lang="en-US" altLang="ko-KR" dirty="0"/>
-              <a:t>Q</a:t>
-            </a:r>
-            <a:r>
-              <a:rPr lang="ko-KR" altLang="en-US" dirty="0"/>
-              <a:t>값의 </a:t>
-            </a:r>
-            <a:r>
-              <a:rPr lang="en-US" altLang="ko-KR" dirty="0"/>
-              <a:t>50% </a:t>
-            </a:r>
-            <a:r>
-              <a:rPr lang="ko-KR" altLang="en-US" dirty="0"/>
-              <a:t>반영</a:t>
-            </a:r>
-            <a:r>
-              <a:rPr lang="en-US" altLang="ko-KR" dirty="0"/>
-              <a:t>. </a:t>
-            </a:r>
-            <a:r>
-              <a:rPr lang="ko-KR" altLang="en-US" dirty="0"/>
-              <a:t>학습 속도는 빠르지만</a:t>
-            </a:r>
-            <a:r>
-              <a:rPr lang="en-US" altLang="ko-KR" dirty="0"/>
-              <a:t>, </a:t>
-            </a:r>
-            <a:r>
-              <a:rPr lang="ko-KR" altLang="en-US" dirty="0"/>
-              <a:t>최신 </a:t>
-            </a:r>
-            <a:r>
-              <a:rPr lang="en-US" altLang="ko-KR" dirty="0"/>
-              <a:t>Episode</a:t>
-            </a:r>
-            <a:r>
-              <a:rPr lang="ko-KR" altLang="en-US" dirty="0"/>
-              <a:t>의 영향 증가</a:t>
-            </a:r>
-            <a:r>
-              <a:rPr lang="en-US" altLang="ko-KR" dirty="0"/>
-              <a:t>. Episode </a:t>
-            </a:r>
-            <a:r>
-              <a:rPr lang="ko-KR" altLang="en-US" dirty="0"/>
-              <a:t>별 </a:t>
-            </a:r>
-            <a:r>
-              <a:rPr lang="en-US" altLang="ko-KR" dirty="0"/>
-              <a:t>Return </a:t>
-            </a:r>
-            <a:r>
-              <a:rPr lang="ko-KR" altLang="en-US" dirty="0"/>
-              <a:t>차이가 큰 경우 </a:t>
-            </a:r>
-            <a:r>
-              <a:rPr lang="en-US" altLang="ko-KR" dirty="0"/>
-              <a:t>Q</a:t>
-            </a:r>
-            <a:r>
-              <a:rPr lang="ko-KR" altLang="en-US" dirty="0"/>
-              <a:t>값의 변동성 증가</a:t>
-            </a:r>
-            <a:endParaRPr lang="en-US" altLang="ko-KR" dirty="0"/>
-          </a:p>
-          <a:p>
-            <a:pPr marL="285750" indent="-285750">
-              <a:buFont typeface="Arial" panose="020B0604020202020204" pitchFamily="34" charset="0"/>
-              <a:buChar char="•"/>
-            </a:pPr>
-            <a:endParaRPr lang="en-US" altLang="ko-KR" dirty="0"/>
-          </a:p>
-          <a:p>
-            <a:pPr marL="285750" indent="-285750">
-              <a:buFont typeface="Arial" panose="020B0604020202020204" pitchFamily="34" charset="0"/>
-              <a:buChar char="•"/>
-            </a:pPr>
-            <a:r>
-              <a:rPr lang="ko-KR" altLang="en-US" dirty="0"/>
-              <a:t>단</a:t>
-            </a:r>
-            <a:r>
-              <a:rPr lang="en-US" altLang="ko-KR" dirty="0"/>
-              <a:t>, Alpha</a:t>
-            </a:r>
-            <a:r>
-              <a:rPr lang="ko-KR" altLang="en-US" dirty="0"/>
-              <a:t>가 증가할 수록 </a:t>
-            </a:r>
-            <a:r>
-              <a:rPr lang="en-US" altLang="ko-KR" dirty="0"/>
-              <a:t>Q</a:t>
-            </a:r>
-            <a:r>
-              <a:rPr lang="ko-KR" altLang="en-US" dirty="0"/>
-              <a:t>값 자체가 커지는 것이 아닌</a:t>
-            </a:r>
-            <a:r>
-              <a:rPr lang="en-US" altLang="ko-KR" dirty="0"/>
-              <a:t>, </a:t>
-            </a:r>
-            <a:r>
-              <a:rPr lang="ko-KR" altLang="en-US" dirty="0"/>
-              <a:t>최근 </a:t>
-            </a:r>
-            <a:r>
-              <a:rPr lang="en-US" altLang="ko-KR" dirty="0"/>
-              <a:t>Episode</a:t>
-            </a:r>
-            <a:r>
-              <a:rPr lang="ko-KR" altLang="en-US" dirty="0"/>
-              <a:t>에서 얻은 </a:t>
-            </a:r>
-            <a:r>
-              <a:rPr lang="en-US" altLang="ko-KR" dirty="0"/>
-              <a:t>Return</a:t>
-            </a:r>
-            <a:r>
-              <a:rPr lang="ko-KR" altLang="en-US" dirty="0"/>
-              <a:t>이 </a:t>
-            </a:r>
-            <a:r>
-              <a:rPr lang="en-US" altLang="ko-KR" dirty="0"/>
-              <a:t>Q</a:t>
-            </a:r>
-            <a:r>
-              <a:rPr lang="ko-KR" altLang="en-US" dirty="0"/>
-              <a:t>값에 미치는 영향과 </a:t>
-            </a:r>
-            <a:r>
-              <a:rPr lang="en-US" altLang="ko-KR" dirty="0"/>
-              <a:t>Q</a:t>
-            </a:r>
-            <a:r>
-              <a:rPr lang="ko-KR" altLang="en-US" dirty="0"/>
-              <a:t>값의 변화 폭 증가</a:t>
-            </a:r>
-          </a:p>
-        </p:txBody>
-      </p:sp>
-    </p:spTree>
-    <p:extLst>
-      <p:ext uri="{BB962C8B-B14F-4D97-AF65-F5344CB8AC3E}">
-        <p14:creationId xmlns:p14="http://schemas.microsoft.com/office/powerpoint/2010/main" val="490718205"/>
-      </p:ext>
-    </p:extLst>
-  </p:cSld>
-  <p:clrMapOvr>
-    <a:masterClrMapping/>
-  </p:clrMapOvr>
-</p:sld>
-</file>
-
 <file path=ppt/slides/slide8.xml><?xml version="1.0" encoding="utf-8"?>
 <p:sld xmlns:a="http://schemas.openxmlformats.org/drawingml/2006/main" xmlns:r="http://schemas.openxmlformats.org/officeDocument/2006/relationships" xmlns:p="http://schemas.openxmlformats.org/presentationml/2006/main">
   <p:cSld>
@@ -6727,7 +6685,7 @@
           <p:cNvPr id="2" name="제목 1">
             <a:extLst>
               <a:ext uri="{FF2B5EF4-FFF2-40B4-BE49-F238E27FC236}">
-                <a16:creationId xmlns:a16="http://schemas.microsoft.com/office/drawing/2014/main" id="{4F5A8108-ED05-C8B3-538C-B61C977CDB8A}"/>
+                <a16:creationId xmlns:a16="http://schemas.microsoft.com/office/drawing/2014/main" id="{05F47E05-2409-F2F5-E759-8FF54D92678B}"/>
               </a:ext>
             </a:extLst>
           </p:cNvPr>
@@ -6745,7 +6703,7 @@
           <a:p>
             <a:r>
               <a:rPr lang="ko-KR" altLang="en-US" dirty="0"/>
-              <a:t>과제 결과</a:t>
+              <a:t>과제 풀이</a:t>
             </a:r>
           </a:p>
         </p:txBody>
@@ -6755,7 +6713,7 @@
           <p:cNvPr id="3" name="내용 개체 틀 2">
             <a:extLst>
               <a:ext uri="{FF2B5EF4-FFF2-40B4-BE49-F238E27FC236}">
-                <a16:creationId xmlns:a16="http://schemas.microsoft.com/office/drawing/2014/main" id="{E7C4356A-B9C5-EDE9-1DDC-9DA3BC6B9B9A}"/>
+                <a16:creationId xmlns:a16="http://schemas.microsoft.com/office/drawing/2014/main" id="{5852B724-E47B-9C14-9E1F-E5FE5A5B6B63}"/>
               </a:ext>
             </a:extLst>
           </p:cNvPr>
@@ -6766,128 +6724,934 @@
             <p:ph idx="1"/>
           </p:nvPr>
         </p:nvSpPr>
-        <p:spPr/>
+        <p:spPr>
+          <a:xfrm>
+            <a:off x="838200" y="1825625"/>
+            <a:ext cx="5501640" cy="4351338"/>
+          </a:xfrm>
+        </p:spPr>
         <p:txBody>
           <a:bodyPr/>
           <a:lstStyle/>
           <a:p>
-            <a:pPr marL="514350" indent="-514350">
-              <a:buFont typeface="+mj-lt"/>
-              <a:buAutoNum type="arabicPeriod"/>
+            <a:pPr marL="0" indent="0">
+              <a:buNone/>
             </a:pPr>
             <a:r>
               <a:rPr lang="en-US" altLang="ko-KR" b="1" dirty="0"/>
-              <a:t>Epsilon</a:t>
-            </a:r>
-          </a:p>
-          <a:p>
-            <a:pPr lvl="1"/>
-            <a:r>
-              <a:rPr lang="en-US" altLang="ko-KR" dirty="0"/>
-              <a:t>Agent</a:t>
-            </a:r>
-            <a:r>
-              <a:rPr lang="ko-KR" altLang="en-US" dirty="0"/>
-              <a:t>가 다양한 </a:t>
-            </a:r>
-            <a:r>
-              <a:rPr lang="en-US" altLang="ko-KR" dirty="0"/>
-              <a:t>Action</a:t>
-            </a:r>
-            <a:r>
-              <a:rPr lang="ko-KR" altLang="en-US" dirty="0"/>
-              <a:t>을 탐색하는 정도를 결정해 학습에 사용되는 경험 자체 변화</a:t>
+              <a:t>Monte Carlo Method - alpha</a:t>
+            </a:r>
+            <a:endParaRPr lang="ko-KR" altLang="en-US" b="1" dirty="0"/>
+          </a:p>
+        </p:txBody>
+      </p:sp>
+      <p:pic>
+        <p:nvPicPr>
+          <p:cNvPr id="6" name="그림 5">
+            <a:extLst>
+              <a:ext uri="{FF2B5EF4-FFF2-40B4-BE49-F238E27FC236}">
+                <a16:creationId xmlns:a16="http://schemas.microsoft.com/office/drawing/2014/main" id="{CF0C7111-E373-228F-C18F-7E2ACD5A6C86}"/>
+              </a:ext>
+            </a:extLst>
+          </p:cNvPr>
+          <p:cNvPicPr>
+            <a:picLocks noChangeAspect="1"/>
+          </p:cNvPicPr>
+          <p:nvPr/>
+        </p:nvPicPr>
+        <p:blipFill>
+          <a:blip r:embed="rId2"/>
+          <a:stretch>
+            <a:fillRect/>
+          </a:stretch>
+        </p:blipFill>
+        <p:spPr>
+          <a:xfrm>
+            <a:off x="6339839" y="2134854"/>
+            <a:ext cx="5394961" cy="3913700"/>
+          </a:xfrm>
+          <a:prstGeom prst="rect">
+            <a:avLst/>
+          </a:prstGeom>
+        </p:spPr>
+      </p:pic>
+      <p:sp>
+        <p:nvSpPr>
+          <p:cNvPr id="8" name="TextBox 7">
+            <a:extLst>
+              <a:ext uri="{FF2B5EF4-FFF2-40B4-BE49-F238E27FC236}">
+                <a16:creationId xmlns:a16="http://schemas.microsoft.com/office/drawing/2014/main" id="{ADD74F28-F057-72DF-86BC-2C0FA413F6A1}"/>
+              </a:ext>
+            </a:extLst>
+          </p:cNvPr>
+          <p:cNvSpPr txBox="1"/>
+          <p:nvPr/>
+        </p:nvSpPr>
+        <p:spPr>
+          <a:xfrm>
+            <a:off x="325120" y="2387272"/>
+            <a:ext cx="6014720" cy="3693319"/>
+          </a:xfrm>
+          <a:prstGeom prst="rect">
+            <a:avLst/>
+          </a:prstGeom>
+          <a:noFill/>
+        </p:spPr>
+        <p:txBody>
+          <a:bodyPr wrap="square" rtlCol="0">
+            <a:spAutoFit/>
+          </a:bodyPr>
+          <a:lstStyle/>
+          <a:p>
+            <a:pPr marL="285750" indent="-285750">
+              <a:buFont typeface="Arial" panose="020B0604020202020204" pitchFamily="34" charset="0"/>
+              <a:buChar char="•"/>
+            </a:pPr>
+            <a:r>
+              <a:rPr lang="en-US" altLang="ko-KR" dirty="0"/>
+              <a:t>Alpha 0.01~0.1</a:t>
+            </a:r>
+            <a:r>
+              <a:rPr lang="ko-KR" altLang="en-US" dirty="0"/>
+              <a:t>에서는 상대적으로 높은 </a:t>
+            </a:r>
+            <a:r>
+              <a:rPr lang="en-US" altLang="ko-KR" dirty="0"/>
+              <a:t>Return </a:t>
+            </a:r>
+            <a:r>
+              <a:rPr lang="ko-KR" altLang="en-US" dirty="0"/>
+              <a:t>유지</a:t>
+            </a:r>
+            <a:r>
+              <a:rPr lang="en-US" altLang="ko-KR" dirty="0"/>
+              <a:t>. 0.05</a:t>
+            </a:r>
+            <a:r>
+              <a:rPr lang="ko-KR" altLang="en-US" dirty="0"/>
+              <a:t>에서는 초기 </a:t>
+            </a:r>
+            <a:r>
+              <a:rPr lang="en-US" altLang="ko-KR" dirty="0"/>
+              <a:t>Return</a:t>
+            </a:r>
+            <a:r>
+              <a:rPr lang="ko-KR" altLang="en-US" dirty="0"/>
+              <a:t>이 낮지만</a:t>
+            </a:r>
+            <a:r>
+              <a:rPr lang="en-US" altLang="ko-KR" dirty="0"/>
+              <a:t>, </a:t>
+            </a:r>
+            <a:r>
+              <a:rPr lang="ko-KR" altLang="en-US" dirty="0"/>
+              <a:t>학습이 진행되면서 증가하는 모습 보임</a:t>
+            </a:r>
+            <a:r>
+              <a:rPr lang="en-US" altLang="ko-KR" dirty="0"/>
+              <a:t>. 0.3~0.5</a:t>
+            </a:r>
+            <a:r>
+              <a:rPr lang="ko-KR" altLang="en-US" dirty="0"/>
+              <a:t>에서는 </a:t>
+            </a:r>
+            <a:r>
+              <a:rPr lang="en-US" altLang="ko-KR" dirty="0"/>
+              <a:t>Episode</a:t>
+            </a:r>
+            <a:r>
+              <a:rPr lang="ko-KR" altLang="en-US" dirty="0"/>
+              <a:t>별 </a:t>
+            </a:r>
+            <a:r>
+              <a:rPr lang="en-US" altLang="ko-KR" dirty="0"/>
+              <a:t>Return </a:t>
+            </a:r>
+            <a:r>
+              <a:rPr lang="ko-KR" altLang="en-US" dirty="0"/>
+              <a:t>변화가 커지고</a:t>
+            </a:r>
+            <a:r>
+              <a:rPr lang="en-US" altLang="ko-KR" dirty="0"/>
+              <a:t>, </a:t>
+            </a:r>
+            <a:r>
+              <a:rPr lang="ko-KR" altLang="en-US" dirty="0"/>
+              <a:t>최근 경험의 영향이 강하게 나타남</a:t>
+            </a:r>
+            <a:r>
+              <a:rPr lang="en-US" altLang="ko-KR" dirty="0"/>
+              <a:t>. Alpha 0.1</a:t>
+            </a:r>
+            <a:r>
+              <a:rPr lang="ko-KR" altLang="en-US" dirty="0"/>
+              <a:t>이 비교적 높은 </a:t>
+            </a:r>
+            <a:r>
+              <a:rPr lang="en-US" altLang="ko-KR" dirty="0"/>
+              <a:t>Return</a:t>
+            </a:r>
+            <a:r>
+              <a:rPr lang="ko-KR" altLang="en-US" dirty="0"/>
+              <a:t>과 안정적인 학습 결과 보임</a:t>
+            </a:r>
+            <a:r>
+              <a:rPr lang="en-US" altLang="ko-KR" dirty="0"/>
+              <a:t>.</a:t>
+            </a:r>
+          </a:p>
+          <a:p>
+            <a:pPr marL="285750" indent="-285750">
+              <a:buFont typeface="Arial" panose="020B0604020202020204" pitchFamily="34" charset="0"/>
+              <a:buChar char="•"/>
+            </a:pPr>
+            <a:r>
+              <a:rPr lang="en-US" altLang="ko-KR" dirty="0"/>
+              <a:t>Alpha</a:t>
+            </a:r>
+            <a:r>
+              <a:rPr lang="ko-KR" altLang="en-US" dirty="0"/>
+              <a:t>가 증가할수록 평균 </a:t>
+            </a:r>
+            <a:r>
+              <a:rPr lang="en-US" altLang="ko-KR" dirty="0"/>
+              <a:t>Q</a:t>
+            </a:r>
+            <a:r>
+              <a:rPr lang="ko-KR" altLang="en-US" dirty="0"/>
+              <a:t>값 갱신 크기가 뚜렷하게 증가</a:t>
+            </a:r>
+            <a:r>
+              <a:rPr lang="en-US" altLang="ko-KR" dirty="0"/>
+              <a:t>. 0.01</a:t>
+            </a:r>
+            <a:r>
+              <a:rPr lang="ko-KR" altLang="en-US" dirty="0"/>
+              <a:t>은 이전 </a:t>
+            </a:r>
+            <a:r>
+              <a:rPr lang="en-US" altLang="ko-KR" dirty="0"/>
+              <a:t>Q</a:t>
+            </a:r>
+            <a:r>
+              <a:rPr lang="ko-KR" altLang="en-US" dirty="0"/>
+              <a:t>값을 크게 유지해 갱신 크기가 작으며</a:t>
+            </a:r>
+            <a:r>
+              <a:rPr lang="en-US" altLang="ko-KR" dirty="0"/>
+              <a:t>, 0.1</a:t>
+            </a:r>
+            <a:r>
+              <a:rPr lang="ko-KR" altLang="en-US" dirty="0"/>
+              <a:t>은 적절한 크기로 지속적으로 </a:t>
+            </a:r>
+            <a:r>
+              <a:rPr lang="en-US" altLang="ko-KR" dirty="0"/>
+              <a:t>Q </a:t>
+            </a:r>
+            <a:r>
+              <a:rPr lang="ko-KR" altLang="en-US" dirty="0"/>
+              <a:t>값 갱신</a:t>
+            </a:r>
+            <a:r>
+              <a:rPr lang="en-US" altLang="ko-KR" dirty="0"/>
+              <a:t>. 0.5</a:t>
+            </a:r>
+            <a:r>
+              <a:rPr lang="ko-KR" altLang="en-US" dirty="0"/>
+              <a:t>는 최신 </a:t>
+            </a:r>
+            <a:r>
+              <a:rPr lang="en-US" altLang="ko-KR" dirty="0"/>
+              <a:t>Return</a:t>
+            </a:r>
+            <a:r>
+              <a:rPr lang="ko-KR" altLang="en-US" dirty="0"/>
+              <a:t>을 </a:t>
+            </a:r>
+            <a:r>
+              <a:rPr lang="en-US" altLang="ko-KR" dirty="0"/>
+              <a:t>50% </a:t>
+            </a:r>
+            <a:r>
+              <a:rPr lang="ko-KR" altLang="en-US" dirty="0"/>
+              <a:t>반영해 갱신 폭이 크고</a:t>
+            </a:r>
+            <a:r>
+              <a:rPr lang="en-US" altLang="ko-KR" dirty="0"/>
+              <a:t>, Episode</a:t>
+            </a:r>
+            <a:r>
+              <a:rPr lang="ko-KR" altLang="en-US" dirty="0"/>
+              <a:t>별 변동이 크게 나타남</a:t>
             </a:r>
             <a:endParaRPr lang="en-US" altLang="ko-KR" dirty="0"/>
           </a:p>
           <a:p>
-            <a:pPr lvl="1"/>
-            <a:r>
-              <a:rPr lang="ko-KR" altLang="en-US" dirty="0"/>
-              <a:t>해당 값이 작을 경우 탐색이 부족하고</a:t>
-            </a:r>
-            <a:r>
-              <a:rPr lang="en-US" altLang="ko-KR" dirty="0"/>
-              <a:t>, </a:t>
-            </a:r>
-            <a:r>
-              <a:rPr lang="ko-KR" altLang="en-US" dirty="0"/>
-              <a:t>클 경우 무작위 행동이 증가</a:t>
-            </a:r>
-            <a:endParaRPr lang="en-US" altLang="ko-KR" dirty="0"/>
-          </a:p>
-          <a:p>
-            <a:pPr marL="514350" indent="-514350">
-              <a:buFont typeface="+mj-lt"/>
-              <a:buAutoNum type="arabicPeriod"/>
+            <a:pPr marL="285750" indent="-285750">
+              <a:buFont typeface="Arial" panose="020B0604020202020204" pitchFamily="34" charset="0"/>
+              <a:buChar char="•"/>
             </a:pPr>
             <a:r>
-              <a:rPr lang="en-US" altLang="ko-KR" b="1" dirty="0"/>
-              <a:t>Alpha</a:t>
-            </a:r>
-          </a:p>
-          <a:p>
-            <a:pPr lvl="1"/>
-            <a:r>
-              <a:rPr lang="ko-KR" altLang="en-US" dirty="0"/>
-              <a:t>해당 경험으로 얻은 </a:t>
-            </a:r>
-            <a:r>
-              <a:rPr lang="en-US" altLang="ko-KR" dirty="0"/>
-              <a:t>Return</a:t>
-            </a:r>
-            <a:r>
-              <a:rPr lang="ko-KR" altLang="en-US" dirty="0"/>
-              <a:t>을 </a:t>
-            </a:r>
-            <a:r>
-              <a:rPr lang="en-US" altLang="ko-KR" dirty="0"/>
-              <a:t>Q Function </a:t>
-            </a:r>
-            <a:r>
-              <a:rPr lang="ko-KR" altLang="en-US" dirty="0"/>
-              <a:t>에 반영하는 정도 결정</a:t>
-            </a:r>
-            <a:endParaRPr lang="en-US" altLang="ko-KR" dirty="0"/>
-          </a:p>
-          <a:p>
-            <a:pPr lvl="1"/>
-            <a:r>
-              <a:rPr lang="ko-KR" altLang="en-US" dirty="0"/>
-              <a:t>해당 값이 작을 경우</a:t>
-            </a:r>
-            <a:r>
-              <a:rPr lang="en-US" altLang="ko-KR" dirty="0"/>
-              <a:t> </a:t>
-            </a:r>
-            <a:r>
-              <a:rPr lang="ko-KR" altLang="en-US" dirty="0"/>
-              <a:t>학습 속도가 저하되고</a:t>
-            </a:r>
-            <a:r>
-              <a:rPr lang="en-US" altLang="ko-KR" dirty="0"/>
-              <a:t>, </a:t>
-            </a:r>
-            <a:r>
-              <a:rPr lang="ko-KR" altLang="en-US" dirty="0"/>
-              <a:t>클 경우 최근 </a:t>
-            </a:r>
-            <a:r>
-              <a:rPr lang="en-US" altLang="ko-KR" dirty="0"/>
-              <a:t>Episode </a:t>
-            </a:r>
-            <a:r>
-              <a:rPr lang="ko-KR" altLang="en-US" dirty="0"/>
-              <a:t>민감도 증가</a:t>
-            </a:r>
-            <a:endParaRPr lang="en-US" altLang="ko-KR" dirty="0"/>
+              <a:rPr lang="en-US" altLang="ko-KR" dirty="0"/>
+              <a:t>Alpha 0.3~0.5</a:t>
+            </a:r>
+            <a:r>
+              <a:rPr lang="ko-KR" altLang="en-US" dirty="0"/>
+              <a:t>에서는 </a:t>
+            </a:r>
+            <a:r>
+              <a:rPr lang="en-US" altLang="ko-KR" dirty="0"/>
+              <a:t>10,000 Episode </a:t>
+            </a:r>
+            <a:r>
+              <a:rPr lang="ko-KR" altLang="en-US" dirty="0"/>
+              <a:t>이후에도 </a:t>
+            </a:r>
+            <a:r>
+              <a:rPr lang="en-US" altLang="ko-KR" dirty="0"/>
+              <a:t>Q</a:t>
+            </a:r>
+            <a:r>
+              <a:rPr lang="ko-KR" altLang="en-US" dirty="0"/>
+              <a:t>값이 크게 변동하는 모습 확인</a:t>
+            </a:r>
           </a:p>
         </p:txBody>
       </p:sp>
     </p:spTree>
     <p:extLst>
       <p:ext uri="{BB962C8B-B14F-4D97-AF65-F5344CB8AC3E}">
-        <p14:creationId xmlns:p14="http://schemas.microsoft.com/office/powerpoint/2010/main" val="2170711995"/>
+        <p14:creationId xmlns:p14="http://schemas.microsoft.com/office/powerpoint/2010/main" val="4168697494"/>
+      </p:ext>
+    </p:extLst>
+  </p:cSld>
+  <p:clrMapOvr>
+    <a:masterClrMapping/>
+  </p:clrMapOvr>
+</p:sld>
+</file>
+
+<file path=ppt/slides/slide9.xml><?xml version="1.0" encoding="utf-8"?>
+<p:sld xmlns:a="http://schemas.openxmlformats.org/drawingml/2006/main" xmlns:r="http://schemas.openxmlformats.org/officeDocument/2006/relationships" xmlns:p="http://schemas.openxmlformats.org/presentationml/2006/main">
+  <p:cSld>
+    <p:spTree>
+      <p:nvGrpSpPr>
+        <p:cNvPr id="1" name=""/>
+        <p:cNvGrpSpPr/>
+        <p:nvPr/>
+      </p:nvGrpSpPr>
+      <p:grpSpPr>
+        <a:xfrm>
+          <a:off x="0" y="0"/>
+          <a:ext cx="0" cy="0"/>
+          <a:chOff x="0" y="0"/>
+          <a:chExt cx="0" cy="0"/>
+        </a:xfrm>
+      </p:grpSpPr>
+      <p:sp>
+        <p:nvSpPr>
+          <p:cNvPr id="2" name="제목 1">
+            <a:extLst>
+              <a:ext uri="{FF2B5EF4-FFF2-40B4-BE49-F238E27FC236}">
+                <a16:creationId xmlns:a16="http://schemas.microsoft.com/office/drawing/2014/main" id="{05F47E05-2409-F2F5-E759-8FF54D92678B}"/>
+              </a:ext>
+            </a:extLst>
+          </p:cNvPr>
+          <p:cNvSpPr>
+            <a:spLocks noGrp="1"/>
+          </p:cNvSpPr>
+          <p:nvPr>
+            <p:ph type="title"/>
+          </p:nvPr>
+        </p:nvSpPr>
+        <p:spPr/>
+        <p:txBody>
+          <a:bodyPr/>
+          <a:lstStyle/>
+          <a:p>
+            <a:r>
+              <a:rPr lang="ko-KR" altLang="en-US" dirty="0"/>
+              <a:t>과제 풀이</a:t>
+            </a:r>
+          </a:p>
+        </p:txBody>
+      </p:sp>
+      <p:sp>
+        <p:nvSpPr>
+          <p:cNvPr id="3" name="내용 개체 틀 2">
+            <a:extLst>
+              <a:ext uri="{FF2B5EF4-FFF2-40B4-BE49-F238E27FC236}">
+                <a16:creationId xmlns:a16="http://schemas.microsoft.com/office/drawing/2014/main" id="{5852B724-E47B-9C14-9E1F-E5FE5A5B6B63}"/>
+              </a:ext>
+            </a:extLst>
+          </p:cNvPr>
+          <p:cNvSpPr>
+            <a:spLocks noGrp="1"/>
+          </p:cNvSpPr>
+          <p:nvPr>
+            <p:ph idx="1"/>
+          </p:nvPr>
+        </p:nvSpPr>
+        <p:spPr>
+          <a:xfrm>
+            <a:off x="838200" y="1825625"/>
+            <a:ext cx="5501640" cy="4351338"/>
+          </a:xfrm>
+        </p:spPr>
+        <p:txBody>
+          <a:bodyPr/>
+          <a:lstStyle/>
+          <a:p>
+            <a:pPr marL="0" indent="0">
+              <a:buNone/>
+            </a:pPr>
+            <a:r>
+              <a:rPr lang="en-US" altLang="ko-KR" b="1" dirty="0"/>
+              <a:t>Monte Carlo Method - alpha</a:t>
+            </a:r>
+            <a:endParaRPr lang="ko-KR" altLang="en-US" b="1" dirty="0"/>
+          </a:p>
+        </p:txBody>
+      </p:sp>
+      <p:sp>
+        <p:nvSpPr>
+          <p:cNvPr id="4" name="TextBox 3">
+            <a:extLst>
+              <a:ext uri="{FF2B5EF4-FFF2-40B4-BE49-F238E27FC236}">
+                <a16:creationId xmlns:a16="http://schemas.microsoft.com/office/drawing/2014/main" id="{742F8D02-3666-D697-123F-252D611E4339}"/>
+              </a:ext>
+            </a:extLst>
+          </p:cNvPr>
+          <p:cNvSpPr txBox="1"/>
+          <p:nvPr/>
+        </p:nvSpPr>
+        <p:spPr>
+          <a:xfrm>
+            <a:off x="433086" y="2204646"/>
+            <a:ext cx="11532772" cy="3970318"/>
+          </a:xfrm>
+          <a:prstGeom prst="rect">
+            <a:avLst/>
+          </a:prstGeom>
+          <a:noFill/>
+        </p:spPr>
+        <p:txBody>
+          <a:bodyPr wrap="square" rtlCol="0">
+            <a:spAutoFit/>
+          </a:bodyPr>
+          <a:lstStyle/>
+          <a:p>
+            <a:pPr marL="285750" indent="-285750">
+              <a:buFont typeface="Arial" panose="020B0604020202020204" pitchFamily="34" charset="0"/>
+              <a:buChar char="•"/>
+            </a:pPr>
+            <a:r>
+              <a:rPr lang="en-US" altLang="ko-KR" dirty="0"/>
+              <a:t>Alpha</a:t>
+            </a:r>
+            <a:r>
+              <a:rPr lang="ko-KR" altLang="en-US" dirty="0"/>
+              <a:t>는 해당 </a:t>
+            </a:r>
+            <a:r>
+              <a:rPr lang="en-US" altLang="ko-KR" dirty="0"/>
+              <a:t>Episode</a:t>
+            </a:r>
+            <a:r>
+              <a:rPr lang="ko-KR" altLang="en-US" dirty="0"/>
+              <a:t>에서 얻은 </a:t>
+            </a:r>
+            <a:r>
+              <a:rPr lang="en-US" altLang="ko-KR" dirty="0"/>
+              <a:t>G</a:t>
+            </a:r>
+            <a:r>
+              <a:rPr lang="ko-KR" altLang="en-US" dirty="0"/>
+              <a:t>를 기존 </a:t>
+            </a:r>
+            <a:r>
+              <a:rPr lang="en-US" altLang="ko-KR" dirty="0"/>
+              <a:t>Q</a:t>
+            </a:r>
+            <a:r>
+              <a:rPr lang="ko-KR" altLang="en-US" dirty="0"/>
+              <a:t>에 얼마나 강하게 넣을 것인가</a:t>
+            </a:r>
+            <a:r>
+              <a:rPr lang="en-US" altLang="ko-KR" dirty="0"/>
+              <a:t>? </a:t>
+            </a:r>
+          </a:p>
+          <a:p>
+            <a:pPr marL="285750" indent="-285750">
+              <a:buFont typeface="Arial" panose="020B0604020202020204" pitchFamily="34" charset="0"/>
+              <a:buChar char="•"/>
+            </a:pPr>
+            <a:r>
+              <a:rPr lang="ko-KR" altLang="en-US" dirty="0"/>
+              <a:t>최신</a:t>
+            </a:r>
+            <a:r>
+              <a:rPr lang="en-US" altLang="ko-KR" dirty="0"/>
+              <a:t> Return</a:t>
+            </a:r>
+            <a:r>
+              <a:rPr lang="ko-KR" altLang="en-US" dirty="0"/>
+              <a:t>에 더 큰 가중치를 주는 </a:t>
+            </a:r>
+            <a:r>
+              <a:rPr lang="en-US" altLang="ko-KR" dirty="0"/>
+              <a:t>Exponential Moving Average</a:t>
+            </a:r>
+          </a:p>
+          <a:p>
+            <a:pPr marL="285750" indent="-285750">
+              <a:buFont typeface="Arial" panose="020B0604020202020204" pitchFamily="34" charset="0"/>
+              <a:buChar char="•"/>
+            </a:pPr>
+            <a:r>
+              <a:rPr lang="en-US" altLang="ko-KR" b="1" dirty="0"/>
+              <a:t>0.01</a:t>
+            </a:r>
+            <a:r>
+              <a:rPr lang="en-US" altLang="ko-KR" dirty="0"/>
+              <a:t> : </a:t>
+            </a:r>
+            <a:r>
+              <a:rPr lang="ko-KR" altLang="en-US" dirty="0" err="1"/>
+              <a:t>학습률이</a:t>
+            </a:r>
+            <a:r>
+              <a:rPr lang="ko-KR" altLang="en-US" dirty="0"/>
+              <a:t> 매우 작아 </a:t>
+            </a:r>
+            <a:r>
+              <a:rPr lang="en-US" altLang="ko-KR" dirty="0"/>
+              <a:t>Q</a:t>
+            </a:r>
+            <a:r>
+              <a:rPr lang="ko-KR" altLang="en-US" dirty="0"/>
+              <a:t>값 변화가 느리며</a:t>
+            </a:r>
+            <a:r>
+              <a:rPr lang="en-US" altLang="ko-KR" dirty="0"/>
+              <a:t>, </a:t>
+            </a:r>
+            <a:r>
+              <a:rPr lang="ko-KR" altLang="en-US" dirty="0"/>
+              <a:t>방문 횟수가 적은 </a:t>
+            </a:r>
+            <a:r>
+              <a:rPr lang="en-US" altLang="ko-KR" dirty="0"/>
+              <a:t>State-Action</a:t>
+            </a:r>
+            <a:r>
+              <a:rPr lang="ko-KR" altLang="en-US" dirty="0"/>
+              <a:t>은 초기값인 </a:t>
+            </a:r>
+            <a:r>
+              <a:rPr lang="en-US" altLang="ko-KR" dirty="0"/>
+              <a:t>0</a:t>
+            </a:r>
+            <a:r>
+              <a:rPr lang="ko-KR" altLang="en-US" dirty="0"/>
+              <a:t>근처에 머무를 가능성 증가</a:t>
+            </a:r>
+            <a:r>
+              <a:rPr lang="en-US" altLang="ko-KR" dirty="0"/>
+              <a:t>.</a:t>
+            </a:r>
+          </a:p>
+          <a:p>
+            <a:pPr marL="285750" indent="-285750">
+              <a:buFont typeface="Arial" panose="020B0604020202020204" pitchFamily="34" charset="0"/>
+              <a:buChar char="•"/>
+            </a:pPr>
+            <a:r>
+              <a:rPr lang="en-US" altLang="ko-KR" b="1" dirty="0"/>
+              <a:t>0.05</a:t>
+            </a:r>
+            <a:r>
+              <a:rPr lang="en-US" altLang="ko-KR" dirty="0"/>
+              <a:t> : 0.01</a:t>
+            </a:r>
+            <a:r>
+              <a:rPr lang="ko-KR" altLang="en-US" dirty="0"/>
+              <a:t>보다 </a:t>
+            </a:r>
+            <a:r>
+              <a:rPr lang="en-US" altLang="ko-KR" dirty="0"/>
+              <a:t>Q </a:t>
+            </a:r>
+            <a:r>
+              <a:rPr lang="ko-KR" altLang="en-US" dirty="0"/>
+              <a:t>오차 </a:t>
+            </a:r>
+            <a:r>
+              <a:rPr lang="ko-KR" altLang="en-US" dirty="0" err="1"/>
+              <a:t>갱신량</a:t>
+            </a:r>
+            <a:r>
+              <a:rPr lang="ko-KR" altLang="en-US" dirty="0"/>
+              <a:t> 반영 비율이 </a:t>
+            </a:r>
+            <a:r>
+              <a:rPr lang="en-US" altLang="ko-KR" dirty="0"/>
+              <a:t>5</a:t>
+            </a:r>
+            <a:r>
+              <a:rPr lang="ko-KR" altLang="en-US" dirty="0"/>
+              <a:t>배 커져 빠른 학습 진행</a:t>
+            </a:r>
+            <a:r>
+              <a:rPr lang="en-US" altLang="ko-KR" dirty="0"/>
+              <a:t>,</a:t>
+            </a:r>
+            <a:r>
+              <a:rPr lang="ko-KR" altLang="en-US" dirty="0"/>
+              <a:t> </a:t>
+            </a:r>
+            <a:r>
+              <a:rPr lang="en-US" altLang="ko-KR" dirty="0"/>
+              <a:t>State Action</a:t>
+            </a:r>
+            <a:r>
+              <a:rPr lang="ko-KR" altLang="en-US" dirty="0"/>
+              <a:t>간 </a:t>
+            </a:r>
+            <a:r>
+              <a:rPr lang="en-US" altLang="ko-KR" dirty="0"/>
+              <a:t>Q</a:t>
+            </a:r>
+            <a:r>
+              <a:rPr lang="ko-KR" altLang="en-US" dirty="0"/>
+              <a:t>값 차이가 더 </a:t>
+            </a:r>
+            <a:r>
+              <a:rPr lang="ko-KR" altLang="en-US" dirty="0" err="1"/>
+              <a:t>뚜렷해짐</a:t>
+            </a:r>
+            <a:r>
+              <a:rPr lang="en-US" altLang="ko-KR" dirty="0"/>
+              <a:t>.</a:t>
+            </a:r>
+          </a:p>
+          <a:p>
+            <a:pPr marL="285750" indent="-285750">
+              <a:buFont typeface="Arial" panose="020B0604020202020204" pitchFamily="34" charset="0"/>
+              <a:buChar char="•"/>
+            </a:pPr>
+            <a:r>
+              <a:rPr lang="en-US" altLang="ko-KR" b="1" dirty="0"/>
+              <a:t>0.1</a:t>
+            </a:r>
+            <a:r>
+              <a:rPr lang="en-US" altLang="ko-KR" dirty="0"/>
+              <a:t> : </a:t>
+            </a:r>
+            <a:r>
+              <a:rPr lang="ko-KR" altLang="en-US" dirty="0"/>
+              <a:t>그리드 전체에 큐 값이 넓게 형성</a:t>
+            </a:r>
+            <a:r>
+              <a:rPr lang="en-US" altLang="ko-KR" dirty="0"/>
+              <a:t>. </a:t>
+            </a:r>
+            <a:r>
+              <a:rPr lang="ko-KR" altLang="en-US" dirty="0"/>
+              <a:t>과거 </a:t>
+            </a:r>
+            <a:r>
+              <a:rPr lang="en-US" altLang="ko-KR" dirty="0"/>
+              <a:t>Q</a:t>
+            </a:r>
+            <a:r>
+              <a:rPr lang="ko-KR" altLang="en-US" dirty="0"/>
+              <a:t>값 </a:t>
+            </a:r>
+            <a:r>
+              <a:rPr lang="en-US" altLang="ko-KR" dirty="0"/>
+              <a:t>90%, </a:t>
+            </a:r>
+            <a:r>
+              <a:rPr lang="ko-KR" altLang="en-US" dirty="0"/>
+              <a:t>새로운 </a:t>
+            </a:r>
+            <a:r>
+              <a:rPr lang="en-US" altLang="ko-KR" dirty="0"/>
+              <a:t>G</a:t>
+            </a:r>
+            <a:r>
+              <a:rPr lang="ko-KR" altLang="en-US" dirty="0"/>
+              <a:t>값 </a:t>
+            </a:r>
+            <a:r>
+              <a:rPr lang="en-US" altLang="ko-KR" dirty="0"/>
+              <a:t>10% </a:t>
+            </a:r>
+            <a:r>
+              <a:rPr lang="ko-KR" altLang="en-US" dirty="0"/>
+              <a:t>반영</a:t>
+            </a:r>
+            <a:r>
+              <a:rPr lang="en-US" altLang="ko-KR" dirty="0"/>
+              <a:t>. </a:t>
+            </a:r>
+          </a:p>
+          <a:p>
+            <a:pPr marL="285750" indent="-285750">
+              <a:buFont typeface="Arial" panose="020B0604020202020204" pitchFamily="34" charset="0"/>
+              <a:buChar char="•"/>
+            </a:pPr>
+            <a:r>
+              <a:rPr lang="en-US" altLang="ko-KR" b="1" dirty="0"/>
+              <a:t>0.3</a:t>
+            </a:r>
+            <a:r>
+              <a:rPr lang="en-US" altLang="ko-KR" dirty="0"/>
+              <a:t> : </a:t>
+            </a:r>
+            <a:r>
+              <a:rPr lang="ko-KR" altLang="en-US" dirty="0"/>
+              <a:t>한 </a:t>
+            </a:r>
+            <a:r>
+              <a:rPr lang="en-US" altLang="ko-KR" dirty="0"/>
+              <a:t>Episode</a:t>
+            </a:r>
+            <a:r>
+              <a:rPr lang="ko-KR" altLang="en-US" dirty="0"/>
+              <a:t>의 </a:t>
+            </a:r>
+            <a:r>
+              <a:rPr lang="en-US" altLang="ko-KR" dirty="0"/>
+              <a:t>Return</a:t>
+            </a:r>
+            <a:r>
+              <a:rPr lang="ko-KR" altLang="en-US" dirty="0"/>
+              <a:t>이 </a:t>
+            </a:r>
+            <a:r>
+              <a:rPr lang="en-US" altLang="ko-KR" dirty="0"/>
+              <a:t>Q</a:t>
+            </a:r>
+            <a:r>
+              <a:rPr lang="ko-KR" altLang="en-US" dirty="0"/>
+              <a:t>에 미치는 영향 증가해</a:t>
+            </a:r>
+            <a:r>
+              <a:rPr lang="en-US" altLang="ko-KR" dirty="0"/>
+              <a:t> Return</a:t>
+            </a:r>
+            <a:r>
+              <a:rPr lang="ko-KR" altLang="en-US" dirty="0"/>
+              <a:t>에 따라 </a:t>
+            </a:r>
+            <a:r>
+              <a:rPr lang="en-US" altLang="ko-KR" dirty="0"/>
+              <a:t>Q</a:t>
+            </a:r>
+            <a:r>
+              <a:rPr lang="ko-KR" altLang="en-US" dirty="0"/>
+              <a:t>값이 빠르게 변화 </a:t>
+            </a:r>
+            <a:r>
+              <a:rPr lang="en-US" altLang="ko-KR" dirty="0"/>
+              <a:t>(</a:t>
+            </a:r>
+            <a:r>
+              <a:rPr lang="ko-KR" altLang="en-US" dirty="0"/>
+              <a:t>증가 및 감소</a:t>
+            </a:r>
+            <a:r>
+              <a:rPr lang="en-US" altLang="ko-KR" dirty="0"/>
+              <a:t>). 0.1</a:t>
+            </a:r>
+            <a:r>
+              <a:rPr lang="ko-KR" altLang="en-US" dirty="0"/>
+              <a:t>보다 </a:t>
+            </a:r>
+            <a:r>
+              <a:rPr lang="en-US" altLang="ko-KR" dirty="0"/>
+              <a:t>Q</a:t>
+            </a:r>
+            <a:r>
+              <a:rPr lang="ko-KR" altLang="en-US" dirty="0"/>
+              <a:t>값 변화폭 증가</a:t>
+            </a:r>
+            <a:endParaRPr lang="en-US" altLang="ko-KR" dirty="0"/>
+          </a:p>
+          <a:p>
+            <a:pPr marL="285750" indent="-285750">
+              <a:buFont typeface="Arial" panose="020B0604020202020204" pitchFamily="34" charset="0"/>
+              <a:buChar char="•"/>
+            </a:pPr>
+            <a:r>
+              <a:rPr lang="en-US" altLang="ko-KR" b="1" dirty="0"/>
+              <a:t>0.5</a:t>
+            </a:r>
+            <a:r>
+              <a:rPr lang="en-US" altLang="ko-KR" dirty="0"/>
+              <a:t> : </a:t>
+            </a:r>
+            <a:r>
+              <a:rPr lang="ko-KR" altLang="en-US" dirty="0"/>
+              <a:t>한 번의 </a:t>
+            </a:r>
+            <a:r>
+              <a:rPr lang="en-US" altLang="ko-KR" dirty="0"/>
+              <a:t>Return</a:t>
+            </a:r>
+            <a:r>
+              <a:rPr lang="ko-KR" altLang="en-US" dirty="0"/>
+              <a:t>이 새로운 </a:t>
+            </a:r>
+            <a:r>
+              <a:rPr lang="en-US" altLang="ko-KR" dirty="0"/>
+              <a:t>Q</a:t>
+            </a:r>
+            <a:r>
+              <a:rPr lang="ko-KR" altLang="en-US" dirty="0"/>
+              <a:t>값의 </a:t>
+            </a:r>
+            <a:r>
+              <a:rPr lang="en-US" altLang="ko-KR" dirty="0"/>
+              <a:t>50% </a:t>
+            </a:r>
+            <a:r>
+              <a:rPr lang="ko-KR" altLang="en-US" dirty="0"/>
+              <a:t>반영</a:t>
+            </a:r>
+            <a:r>
+              <a:rPr lang="en-US" altLang="ko-KR" dirty="0"/>
+              <a:t>. </a:t>
+            </a:r>
+            <a:r>
+              <a:rPr lang="ko-KR" altLang="en-US" dirty="0"/>
+              <a:t>학습 속도는 빠르지만</a:t>
+            </a:r>
+            <a:r>
+              <a:rPr lang="en-US" altLang="ko-KR" dirty="0"/>
+              <a:t>, </a:t>
+            </a:r>
+            <a:r>
+              <a:rPr lang="ko-KR" altLang="en-US" dirty="0"/>
+              <a:t>최신 </a:t>
+            </a:r>
+            <a:r>
+              <a:rPr lang="en-US" altLang="ko-KR" dirty="0"/>
+              <a:t>Episode</a:t>
+            </a:r>
+            <a:r>
+              <a:rPr lang="ko-KR" altLang="en-US" dirty="0"/>
+              <a:t>의 영향 증가</a:t>
+            </a:r>
+            <a:r>
+              <a:rPr lang="en-US" altLang="ko-KR" dirty="0"/>
+              <a:t>. Episode </a:t>
+            </a:r>
+            <a:r>
+              <a:rPr lang="ko-KR" altLang="en-US" dirty="0"/>
+              <a:t>별 </a:t>
+            </a:r>
+            <a:r>
+              <a:rPr lang="en-US" altLang="ko-KR" dirty="0"/>
+              <a:t>Return </a:t>
+            </a:r>
+            <a:r>
+              <a:rPr lang="ko-KR" altLang="en-US" dirty="0"/>
+              <a:t>차이가 큰 경우 </a:t>
+            </a:r>
+            <a:r>
+              <a:rPr lang="en-US" altLang="ko-KR" dirty="0"/>
+              <a:t>Q</a:t>
+            </a:r>
+            <a:r>
+              <a:rPr lang="ko-KR" altLang="en-US" dirty="0"/>
+              <a:t>값의 변동성 증가</a:t>
+            </a:r>
+            <a:endParaRPr lang="en-US" altLang="ko-KR" dirty="0"/>
+          </a:p>
+          <a:p>
+            <a:pPr marL="285750" indent="-285750">
+              <a:buFont typeface="Arial" panose="020B0604020202020204" pitchFamily="34" charset="0"/>
+              <a:buChar char="•"/>
+            </a:pPr>
+            <a:endParaRPr lang="en-US" altLang="ko-KR" dirty="0"/>
+          </a:p>
+          <a:p>
+            <a:pPr marL="285750" indent="-285750">
+              <a:buFont typeface="Arial" panose="020B0604020202020204" pitchFamily="34" charset="0"/>
+              <a:buChar char="•"/>
+            </a:pPr>
+            <a:r>
+              <a:rPr lang="ko-KR" altLang="en-US" dirty="0"/>
+              <a:t>단</a:t>
+            </a:r>
+            <a:r>
+              <a:rPr lang="en-US" altLang="ko-KR" dirty="0"/>
+              <a:t>, Alpha</a:t>
+            </a:r>
+            <a:r>
+              <a:rPr lang="ko-KR" altLang="en-US" dirty="0"/>
+              <a:t>가 증가할 수록 </a:t>
+            </a:r>
+            <a:r>
+              <a:rPr lang="en-US" altLang="ko-KR" dirty="0"/>
+              <a:t>Q</a:t>
+            </a:r>
+            <a:r>
+              <a:rPr lang="ko-KR" altLang="en-US" dirty="0"/>
+              <a:t>값 자체가 커지는 것이 아닌</a:t>
+            </a:r>
+            <a:r>
+              <a:rPr lang="en-US" altLang="ko-KR" dirty="0"/>
+              <a:t>, </a:t>
+            </a:r>
+            <a:r>
+              <a:rPr lang="ko-KR" altLang="en-US" dirty="0"/>
+              <a:t>최근 </a:t>
+            </a:r>
+            <a:r>
+              <a:rPr lang="en-US" altLang="ko-KR" dirty="0"/>
+              <a:t>Episode</a:t>
+            </a:r>
+            <a:r>
+              <a:rPr lang="ko-KR" altLang="en-US" dirty="0"/>
+              <a:t>에서 얻은 </a:t>
+            </a:r>
+            <a:r>
+              <a:rPr lang="en-US" altLang="ko-KR" dirty="0"/>
+              <a:t>Return</a:t>
+            </a:r>
+            <a:r>
+              <a:rPr lang="ko-KR" altLang="en-US" dirty="0"/>
+              <a:t>이 </a:t>
+            </a:r>
+            <a:r>
+              <a:rPr lang="en-US" altLang="ko-KR" dirty="0"/>
+              <a:t>Q</a:t>
+            </a:r>
+            <a:r>
+              <a:rPr lang="ko-KR" altLang="en-US" dirty="0"/>
+              <a:t>값에 미치는 영향과 </a:t>
+            </a:r>
+            <a:r>
+              <a:rPr lang="en-US" altLang="ko-KR" dirty="0"/>
+              <a:t>Q</a:t>
+            </a:r>
+            <a:r>
+              <a:rPr lang="ko-KR" altLang="en-US" dirty="0"/>
+              <a:t>값의 변화 폭 증가</a:t>
+            </a:r>
+          </a:p>
+        </p:txBody>
+      </p:sp>
+    </p:spTree>
+    <p:extLst>
+      <p:ext uri="{BB962C8B-B14F-4D97-AF65-F5344CB8AC3E}">
+        <p14:creationId xmlns:p14="http://schemas.microsoft.com/office/powerpoint/2010/main" val="490718205"/>
       </p:ext>
     </p:extLst>
   </p:cSld>
